--- a/Présentation_NSI_Première.pptx
+++ b/Présentation_NSI_Première.pptx
@@ -18,8 +18,7 @@
     <p:sldId id="270" r:id="rId12"/>
     <p:sldId id="269" r:id="rId13"/>
     <p:sldId id="273" r:id="rId14"/>
-    <p:sldId id="274" r:id="rId15"/>
-    <p:sldId id="275" r:id="rId16"/>
+    <p:sldId id="275" r:id="rId15"/>
   </p:sldIdLst>
   <p:sldSz cx="12192000" cy="6858000"/>
   <p:notesSz cx="6858000" cy="9144000"/>
@@ -129,96 +128,35 @@
 <file path=ppt/changesInfos/changesInfo1.xml><?xml version="1.0" encoding="utf-8"?>
 <pc:chgInfo xmlns:a="http://schemas.openxmlformats.org/drawingml/2006/main" xmlns:r="http://schemas.openxmlformats.org/officeDocument/2006/relationships" xmlns:ac="http://schemas.microsoft.com/office/drawing/2013/main/command" xmlns:pc="http://schemas.microsoft.com/office/powerpoint/2013/main/command">
   <pc:docChgLst>
-    <pc:chgData name="laurent mayer" userId="c07e7b6061ff73d3" providerId="LiveId" clId="{39E3C0F7-B58F-4529-A6CA-36BCE434C4FF}"/>
-    <pc:docChg chg="custSel delSld modSld">
-      <pc:chgData name="laurent mayer" userId="c07e7b6061ff73d3" providerId="LiveId" clId="{39E3C0F7-B58F-4529-A6CA-36BCE434C4FF}" dt="2021-12-15T16:03:20.994" v="99" actId="2696"/>
+    <pc:chgData name="laurent mayer" userId="c07e7b6061ff73d3" providerId="LiveId" clId="{25FA86AD-85F0-4D1E-A900-5A4FA29F885D}"/>
+    <pc:docChg chg="delSld modSld">
+      <pc:chgData name="laurent mayer" userId="c07e7b6061ff73d3" providerId="LiveId" clId="{25FA86AD-85F0-4D1E-A900-5A4FA29F885D}" dt="2026-09-05T14:38:25.449" v="16" actId="2696"/>
       <pc:docMkLst>
         <pc:docMk/>
       </pc:docMkLst>
       <pc:sldChg chg="modSp mod">
-        <pc:chgData name="laurent mayer" userId="c07e7b6061ff73d3" providerId="LiveId" clId="{39E3C0F7-B58F-4529-A6CA-36BCE434C4FF}" dt="2021-12-15T15:59:33.355" v="3" actId="20577"/>
+        <pc:chgData name="laurent mayer" userId="c07e7b6061ff73d3" providerId="LiveId" clId="{25FA86AD-85F0-4D1E-A900-5A4FA29F885D}" dt="2026-09-05T14:37:04.067" v="10" actId="20577"/>
         <pc:sldMkLst>
           <pc:docMk/>
-          <pc:sldMk cId="4033162268" sldId="258"/>
+          <pc:sldMk cId="4137575012" sldId="260"/>
         </pc:sldMkLst>
         <pc:spChg chg="mod">
-          <ac:chgData name="laurent mayer" userId="c07e7b6061ff73d3" providerId="LiveId" clId="{39E3C0F7-B58F-4529-A6CA-36BCE434C4FF}" dt="2021-12-15T15:59:33.355" v="3" actId="20577"/>
+          <ac:chgData name="laurent mayer" userId="c07e7b6061ff73d3" providerId="LiveId" clId="{25FA86AD-85F0-4D1E-A900-5A4FA29F885D}" dt="2026-09-05T14:37:04.067" v="10" actId="20577"/>
           <ac:spMkLst>
             <pc:docMk/>
-            <pc:sldMk cId="4033162268" sldId="258"/>
-            <ac:spMk id="3" creationId="{D7D801D0-49F9-49B6-A0C8-C1C2FD858663}"/>
+            <pc:sldMk cId="4137575012" sldId="260"/>
+            <ac:spMk id="3" creationId="{E3CC8506-3F66-4901-B787-87052BBC1ABF}"/>
           </ac:spMkLst>
         </pc:spChg>
       </pc:sldChg>
       <pc:sldChg chg="modSp mod">
-        <pc:chgData name="laurent mayer" userId="c07e7b6061ff73d3" providerId="LiveId" clId="{39E3C0F7-B58F-4529-A6CA-36BCE434C4FF}" dt="2021-12-15T16:02:39.682" v="97" actId="20577"/>
-        <pc:sldMkLst>
-          <pc:docMk/>
-          <pc:sldMk cId="3060983021" sldId="262"/>
-        </pc:sldMkLst>
-        <pc:spChg chg="mod">
-          <ac:chgData name="laurent mayer" userId="c07e7b6061ff73d3" providerId="LiveId" clId="{39E3C0F7-B58F-4529-A6CA-36BCE434C4FF}" dt="2021-12-15T16:02:39.682" v="97" actId="20577"/>
-          <ac:spMkLst>
-            <pc:docMk/>
-            <pc:sldMk cId="3060983021" sldId="262"/>
-            <ac:spMk id="3" creationId="{C7BB12F4-C546-4A4B-BEA7-A47C53A09318}"/>
-          </ac:spMkLst>
-        </pc:spChg>
-      </pc:sldChg>
-      <pc:sldChg chg="modSp mod">
-        <pc:chgData name="laurent mayer" userId="c07e7b6061ff73d3" providerId="LiveId" clId="{39E3C0F7-B58F-4529-A6CA-36BCE434C4FF}" dt="2021-12-15T16:03:06.035" v="98" actId="20577"/>
-        <pc:sldMkLst>
-          <pc:docMk/>
-          <pc:sldMk cId="783092640" sldId="263"/>
-        </pc:sldMkLst>
-        <pc:spChg chg="mod">
-          <ac:chgData name="laurent mayer" userId="c07e7b6061ff73d3" providerId="LiveId" clId="{39E3C0F7-B58F-4529-A6CA-36BCE434C4FF}" dt="2021-12-15T16:03:06.035" v="98" actId="20577"/>
-          <ac:spMkLst>
-            <pc:docMk/>
-            <pc:sldMk cId="783092640" sldId="263"/>
-            <ac:spMk id="3" creationId="{4E9D8150-D681-463F-AD42-D81B997FE06E}"/>
-          </ac:spMkLst>
-        </pc:spChg>
-      </pc:sldChg>
-      <pc:sldChg chg="del">
-        <pc:chgData name="laurent mayer" userId="c07e7b6061ff73d3" providerId="LiveId" clId="{39E3C0F7-B58F-4529-A6CA-36BCE434C4FF}" dt="2021-12-15T16:03:20.994" v="99" actId="2696"/>
-        <pc:sldMkLst>
-          <pc:docMk/>
-          <pc:sldMk cId="3936822647" sldId="265"/>
-        </pc:sldMkLst>
-      </pc:sldChg>
-      <pc:sldChg chg="modSp mod">
-        <pc:chgData name="laurent mayer" userId="c07e7b6061ff73d3" providerId="LiveId" clId="{39E3C0F7-B58F-4529-A6CA-36BCE434C4FF}" dt="2021-12-15T16:01:42.826" v="95" actId="20577"/>
-        <pc:sldMkLst>
-          <pc:docMk/>
-          <pc:sldMk cId="2942347136" sldId="267"/>
-        </pc:sldMkLst>
-        <pc:spChg chg="mod">
-          <ac:chgData name="laurent mayer" userId="c07e7b6061ff73d3" providerId="LiveId" clId="{39E3C0F7-B58F-4529-A6CA-36BCE434C4FF}" dt="2021-12-15T16:01:42.826" v="95" actId="20577"/>
-          <ac:spMkLst>
-            <pc:docMk/>
-            <pc:sldMk cId="2942347136" sldId="267"/>
-            <ac:spMk id="3" creationId="{39844823-2ACF-4C69-98BF-F99FDF793C32}"/>
-          </ac:spMkLst>
-        </pc:spChg>
-      </pc:sldChg>
-    </pc:docChg>
-  </pc:docChgLst>
-  <pc:docChgLst>
-    <pc:chgData name="laurent mayer" userId="c07e7b6061ff73d3" providerId="LiveId" clId="{7EEDD2F1-AEAC-4DE5-95B5-B6CC4E979292}"/>
-    <pc:docChg chg="undo custSel addSld delSld modSld sldOrd">
-      <pc:chgData name="laurent mayer" userId="c07e7b6061ff73d3" providerId="LiveId" clId="{7EEDD2F1-AEAC-4DE5-95B5-B6CC4E979292}" dt="2024-08-26T16:45:23.344" v="650" actId="113"/>
-      <pc:docMkLst>
-        <pc:docMk/>
-      </pc:docMkLst>
-      <pc:sldChg chg="modSp mod">
-        <pc:chgData name="laurent mayer" userId="c07e7b6061ff73d3" providerId="LiveId" clId="{7EEDD2F1-AEAC-4DE5-95B5-B6CC4E979292}" dt="2024-08-26T13:51:20.897" v="91" actId="207"/>
+        <pc:chgData name="laurent mayer" userId="c07e7b6061ff73d3" providerId="LiveId" clId="{25FA86AD-85F0-4D1E-A900-5A4FA29F885D}" dt="2026-09-05T14:36:42.052" v="2" actId="20577"/>
         <pc:sldMkLst>
           <pc:docMk/>
           <pc:sldMk cId="1159492700" sldId="261"/>
         </pc:sldMkLst>
         <pc:spChg chg="mod">
-          <ac:chgData name="laurent mayer" userId="c07e7b6061ff73d3" providerId="LiveId" clId="{7EEDD2F1-AEAC-4DE5-95B5-B6CC4E979292}" dt="2024-08-26T13:51:20.897" v="91" actId="207"/>
+          <ac:chgData name="laurent mayer" userId="c07e7b6061ff73d3" providerId="LiveId" clId="{25FA86AD-85F0-4D1E-A900-5A4FA29F885D}" dt="2026-09-05T14:36:42.052" v="2" actId="20577"/>
           <ac:spMkLst>
             <pc:docMk/>
             <pc:sldMk cId="1159492700" sldId="261"/>
@@ -227,13 +165,13 @@
         </pc:spChg>
       </pc:sldChg>
       <pc:sldChg chg="modSp mod">
-        <pc:chgData name="laurent mayer" userId="c07e7b6061ff73d3" providerId="LiveId" clId="{7EEDD2F1-AEAC-4DE5-95B5-B6CC4E979292}" dt="2024-08-26T13:56:02.950" v="92" actId="20577"/>
+        <pc:chgData name="laurent mayer" userId="c07e7b6061ff73d3" providerId="LiveId" clId="{25FA86AD-85F0-4D1E-A900-5A4FA29F885D}" dt="2026-09-05T14:37:39.608" v="15" actId="207"/>
         <pc:sldMkLst>
           <pc:docMk/>
           <pc:sldMk cId="3060983021" sldId="262"/>
         </pc:sldMkLst>
         <pc:spChg chg="mod">
-          <ac:chgData name="laurent mayer" userId="c07e7b6061ff73d3" providerId="LiveId" clId="{7EEDD2F1-AEAC-4DE5-95B5-B6CC4E979292}" dt="2024-08-26T13:56:02.950" v="92" actId="20577"/>
+          <ac:chgData name="laurent mayer" userId="c07e7b6061ff73d3" providerId="LiveId" clId="{25FA86AD-85F0-4D1E-A900-5A4FA29F885D}" dt="2026-09-05T14:37:39.608" v="15" actId="207"/>
           <ac:spMkLst>
             <pc:docMk/>
             <pc:sldMk cId="3060983021" sldId="262"/>
@@ -241,1034 +179,12 @@
           </ac:spMkLst>
         </pc:spChg>
       </pc:sldChg>
-      <pc:sldChg chg="modSp mod">
-        <pc:chgData name="laurent mayer" userId="c07e7b6061ff73d3" providerId="LiveId" clId="{7EEDD2F1-AEAC-4DE5-95B5-B6CC4E979292}" dt="2024-08-26T13:56:22.604" v="93" actId="207"/>
-        <pc:sldMkLst>
-          <pc:docMk/>
-          <pc:sldMk cId="783092640" sldId="263"/>
-        </pc:sldMkLst>
-        <pc:spChg chg="mod">
-          <ac:chgData name="laurent mayer" userId="c07e7b6061ff73d3" providerId="LiveId" clId="{7EEDD2F1-AEAC-4DE5-95B5-B6CC4E979292}" dt="2024-08-26T13:56:22.604" v="93" actId="207"/>
-          <ac:spMkLst>
-            <pc:docMk/>
-            <pc:sldMk cId="783092640" sldId="263"/>
-            <ac:spMk id="3" creationId="{4E9D8150-D681-463F-AD42-D81B997FE06E}"/>
-          </ac:spMkLst>
-        </pc:spChg>
-      </pc:sldChg>
-      <pc:sldChg chg="modSp mod ord">
-        <pc:chgData name="laurent mayer" userId="c07e7b6061ff73d3" providerId="LiveId" clId="{7EEDD2F1-AEAC-4DE5-95B5-B6CC4E979292}" dt="2024-08-26T14:00:06.987" v="111" actId="20577"/>
-        <pc:sldMkLst>
-          <pc:docMk/>
-          <pc:sldMk cId="2491103863" sldId="269"/>
-        </pc:sldMkLst>
-        <pc:spChg chg="mod">
-          <ac:chgData name="laurent mayer" userId="c07e7b6061ff73d3" providerId="LiveId" clId="{7EEDD2F1-AEAC-4DE5-95B5-B6CC4E979292}" dt="2024-08-26T14:00:06.987" v="111" actId="20577"/>
-          <ac:spMkLst>
-            <pc:docMk/>
-            <pc:sldMk cId="2491103863" sldId="269"/>
-            <ac:spMk id="4" creationId="{2016EE66-E812-4A37-BA78-4E46640E905F}"/>
-          </ac:spMkLst>
-        </pc:spChg>
-      </pc:sldChg>
-      <pc:sldChg chg="ord">
-        <pc:chgData name="laurent mayer" userId="c07e7b6061ff73d3" providerId="LiveId" clId="{7EEDD2F1-AEAC-4DE5-95B5-B6CC4E979292}" dt="2024-08-26T13:57:44.095" v="97"/>
-        <pc:sldMkLst>
-          <pc:docMk/>
-          <pc:sldMk cId="2568864071" sldId="270"/>
-        </pc:sldMkLst>
-      </pc:sldChg>
-      <pc:sldChg chg="modSp mod">
-        <pc:chgData name="laurent mayer" userId="c07e7b6061ff73d3" providerId="LiveId" clId="{7EEDD2F1-AEAC-4DE5-95B5-B6CC4E979292}" dt="2024-08-26T16:25:42.106" v="508" actId="27636"/>
-        <pc:sldMkLst>
-          <pc:docMk/>
-          <pc:sldMk cId="2285449741" sldId="271"/>
-        </pc:sldMkLst>
-        <pc:spChg chg="mod">
-          <ac:chgData name="laurent mayer" userId="c07e7b6061ff73d3" providerId="LiveId" clId="{7EEDD2F1-AEAC-4DE5-95B5-B6CC4E979292}" dt="2024-08-26T16:25:42.106" v="508" actId="27636"/>
-          <ac:spMkLst>
-            <pc:docMk/>
-            <pc:sldMk cId="2285449741" sldId="271"/>
-            <ac:spMk id="4" creationId="{11295D77-AD10-F9E1-65DD-4EEDE11272B8}"/>
-          </ac:spMkLst>
-        </pc:spChg>
-        <pc:spChg chg="mod">
-          <ac:chgData name="laurent mayer" userId="c07e7b6061ff73d3" providerId="LiveId" clId="{7EEDD2F1-AEAC-4DE5-95B5-B6CC4E979292}" dt="2024-08-26T16:25:42.104" v="507" actId="27636"/>
-          <ac:spMkLst>
-            <pc:docMk/>
-            <pc:sldMk cId="2285449741" sldId="271"/>
-            <ac:spMk id="5" creationId="{E398CF0B-4D27-353F-2785-1FB5DD4045A8}"/>
-          </ac:spMkLst>
-        </pc:spChg>
-      </pc:sldChg>
-      <pc:sldChg chg="modSp add del mod ord">
-        <pc:chgData name="laurent mayer" userId="c07e7b6061ff73d3" providerId="LiveId" clId="{7EEDD2F1-AEAC-4DE5-95B5-B6CC4E979292}" dt="2024-08-26T16:09:47.845" v="470"/>
-        <pc:sldMkLst>
-          <pc:docMk/>
-          <pc:sldMk cId="2586275938" sldId="273"/>
-        </pc:sldMkLst>
-        <pc:spChg chg="mod">
-          <ac:chgData name="laurent mayer" userId="c07e7b6061ff73d3" providerId="LiveId" clId="{7EEDD2F1-AEAC-4DE5-95B5-B6CC4E979292}" dt="2024-08-26T14:14:08.511" v="148" actId="20577"/>
-          <ac:spMkLst>
-            <pc:docMk/>
-            <pc:sldMk cId="2586275938" sldId="273"/>
-            <ac:spMk id="4" creationId="{72DE6800-6223-4850-91CD-8B369F4EF3E6}"/>
-          </ac:spMkLst>
-        </pc:spChg>
-      </pc:sldChg>
-      <pc:sldChg chg="new del">
-        <pc:chgData name="laurent mayer" userId="c07e7b6061ff73d3" providerId="LiveId" clId="{7EEDD2F1-AEAC-4DE5-95B5-B6CC4E979292}" dt="2024-08-26T14:14:51.482" v="150" actId="2696"/>
-        <pc:sldMkLst>
-          <pc:docMk/>
-          <pc:sldMk cId="291560272" sldId="274"/>
-        </pc:sldMkLst>
-      </pc:sldChg>
-      <pc:sldChg chg="modSp add mod">
-        <pc:chgData name="laurent mayer" userId="c07e7b6061ff73d3" providerId="LiveId" clId="{7EEDD2F1-AEAC-4DE5-95B5-B6CC4E979292}" dt="2024-08-26T16:45:23.344" v="650" actId="113"/>
+      <pc:sldChg chg="del">
+        <pc:chgData name="laurent mayer" userId="c07e7b6061ff73d3" providerId="LiveId" clId="{25FA86AD-85F0-4D1E-A900-5A4FA29F885D}" dt="2026-09-05T14:38:25.449" v="16" actId="2696"/>
         <pc:sldMkLst>
           <pc:docMk/>
           <pc:sldMk cId="3923696457" sldId="274"/>
         </pc:sldMkLst>
-        <pc:spChg chg="mod">
-          <ac:chgData name="laurent mayer" userId="c07e7b6061ff73d3" providerId="LiveId" clId="{7EEDD2F1-AEAC-4DE5-95B5-B6CC4E979292}" dt="2024-08-26T16:45:23.344" v="650" actId="113"/>
-          <ac:spMkLst>
-            <pc:docMk/>
-            <pc:sldMk cId="3923696457" sldId="274"/>
-            <ac:spMk id="2" creationId="{0BE0E897-9AED-30BD-48D9-2ECCEF704597}"/>
-          </ac:spMkLst>
-        </pc:spChg>
-        <pc:spChg chg="mod">
-          <ac:chgData name="laurent mayer" userId="c07e7b6061ff73d3" providerId="LiveId" clId="{7EEDD2F1-AEAC-4DE5-95B5-B6CC4E979292}" dt="2024-08-26T16:45:13.144" v="647" actId="27636"/>
-          <ac:spMkLst>
-            <pc:docMk/>
-            <pc:sldMk cId="3923696457" sldId="274"/>
-            <ac:spMk id="3" creationId="{749F0171-8AAB-6F7A-B680-88FB3A4DF5D0}"/>
-          </ac:spMkLst>
-        </pc:spChg>
-        <pc:spChg chg="mod">
-          <ac:chgData name="laurent mayer" userId="c07e7b6061ff73d3" providerId="LiveId" clId="{7EEDD2F1-AEAC-4DE5-95B5-B6CC4E979292}" dt="2024-08-26T15:44:39.540" v="303" actId="20577"/>
-          <ac:spMkLst>
-            <pc:docMk/>
-            <pc:sldMk cId="3923696457" sldId="274"/>
-            <ac:spMk id="4" creationId="{72DE6800-6223-4850-91CD-8B369F4EF3E6}"/>
-          </ac:spMkLst>
-        </pc:spChg>
-      </pc:sldChg>
-    </pc:docChg>
-  </pc:docChgLst>
-  <pc:docChgLst>
-    <pc:chgData name="laurent mayer" userId="c07e7b6061ff73d3" providerId="LiveId" clId="{7D450AA3-046A-48FC-ABB5-54D7AA942888}"/>
-    <pc:docChg chg="undo custSel addSld delSld modSld modMainMaster">
-      <pc:chgData name="laurent mayer" userId="c07e7b6061ff73d3" providerId="LiveId" clId="{7D450AA3-046A-48FC-ABB5-54D7AA942888}" dt="2021-09-04T14:52:17.469" v="7084" actId="114"/>
-      <pc:docMkLst>
-        <pc:docMk/>
-      </pc:docMkLst>
-      <pc:sldChg chg="modSp new mod modTransition setBg">
-        <pc:chgData name="laurent mayer" userId="c07e7b6061ff73d3" providerId="LiveId" clId="{7D450AA3-046A-48FC-ABB5-54D7AA942888}" dt="2021-09-04T14:50:56.050" v="7078"/>
-        <pc:sldMkLst>
-          <pc:docMk/>
-          <pc:sldMk cId="1742829473" sldId="256"/>
-        </pc:sldMkLst>
-        <pc:spChg chg="mod">
-          <ac:chgData name="laurent mayer" userId="c07e7b6061ff73d3" providerId="LiveId" clId="{7D450AA3-046A-48FC-ABB5-54D7AA942888}" dt="2021-08-27T14:19:13.795" v="22" actId="113"/>
-          <ac:spMkLst>
-            <pc:docMk/>
-            <pc:sldMk cId="1742829473" sldId="256"/>
-            <ac:spMk id="2" creationId="{E24CD051-21A5-4382-B09C-85C2550763BF}"/>
-          </ac:spMkLst>
-        </pc:spChg>
-        <pc:spChg chg="mod">
-          <ac:chgData name="laurent mayer" userId="c07e7b6061ff73d3" providerId="LiveId" clId="{7D450AA3-046A-48FC-ABB5-54D7AA942888}" dt="2021-08-27T14:24:53.341" v="227" actId="207"/>
-          <ac:spMkLst>
-            <pc:docMk/>
-            <pc:sldMk cId="1742829473" sldId="256"/>
-            <ac:spMk id="3" creationId="{B60C1E33-E952-4DE0-B67F-BEAEAA2E6680}"/>
-          </ac:spMkLst>
-        </pc:spChg>
-      </pc:sldChg>
-      <pc:sldChg chg="modSp new mod modTransition">
-        <pc:chgData name="laurent mayer" userId="c07e7b6061ff73d3" providerId="LiveId" clId="{7D450AA3-046A-48FC-ABB5-54D7AA942888}" dt="2021-09-04T14:50:56.050" v="7078"/>
-        <pc:sldMkLst>
-          <pc:docMk/>
-          <pc:sldMk cId="860698047" sldId="257"/>
-        </pc:sldMkLst>
-        <pc:spChg chg="mod">
-          <ac:chgData name="laurent mayer" userId="c07e7b6061ff73d3" providerId="LiveId" clId="{7D450AA3-046A-48FC-ABB5-54D7AA942888}" dt="2021-08-27T14:25:35.392" v="254" actId="113"/>
-          <ac:spMkLst>
-            <pc:docMk/>
-            <pc:sldMk cId="860698047" sldId="257"/>
-            <ac:spMk id="2" creationId="{2A9978FE-EFC4-49C1-BA5B-85F4116D0E92}"/>
-          </ac:spMkLst>
-        </pc:spChg>
-        <pc:spChg chg="mod">
-          <ac:chgData name="laurent mayer" userId="c07e7b6061ff73d3" providerId="LiveId" clId="{7D450AA3-046A-48FC-ABB5-54D7AA942888}" dt="2021-08-27T14:47:37.082" v="969"/>
-          <ac:spMkLst>
-            <pc:docMk/>
-            <pc:sldMk cId="860698047" sldId="257"/>
-            <ac:spMk id="3" creationId="{1BED4607-CE43-4C62-B323-C757C8956135}"/>
-          </ac:spMkLst>
-        </pc:spChg>
-      </pc:sldChg>
-      <pc:sldChg chg="modSp new mod modTransition">
-        <pc:chgData name="laurent mayer" userId="c07e7b6061ff73d3" providerId="LiveId" clId="{7D450AA3-046A-48FC-ABB5-54D7AA942888}" dt="2021-09-04T14:50:56.050" v="7078"/>
-        <pc:sldMkLst>
-          <pc:docMk/>
-          <pc:sldMk cId="4033162268" sldId="258"/>
-        </pc:sldMkLst>
-        <pc:spChg chg="mod">
-          <ac:chgData name="laurent mayer" userId="c07e7b6061ff73d3" providerId="LiveId" clId="{7D450AA3-046A-48FC-ABB5-54D7AA942888}" dt="2021-08-27T14:43:18.847" v="894" actId="20577"/>
-          <ac:spMkLst>
-            <pc:docMk/>
-            <pc:sldMk cId="4033162268" sldId="258"/>
-            <ac:spMk id="2" creationId="{0ACCDA59-9C20-4CAA-B42A-9659AAB4606A}"/>
-          </ac:spMkLst>
-        </pc:spChg>
-        <pc:spChg chg="mod">
-          <ac:chgData name="laurent mayer" userId="c07e7b6061ff73d3" providerId="LiveId" clId="{7D450AA3-046A-48FC-ABB5-54D7AA942888}" dt="2021-08-27T15:05:19.968" v="1420" actId="207"/>
-          <ac:spMkLst>
-            <pc:docMk/>
-            <pc:sldMk cId="4033162268" sldId="258"/>
-            <ac:spMk id="3" creationId="{D7D801D0-49F9-49B6-A0C8-C1C2FD858663}"/>
-          </ac:spMkLst>
-        </pc:spChg>
-      </pc:sldChg>
-      <pc:sldChg chg="modSp new mod modTransition">
-        <pc:chgData name="laurent mayer" userId="c07e7b6061ff73d3" providerId="LiveId" clId="{7D450AA3-046A-48FC-ABB5-54D7AA942888}" dt="2021-09-04T14:51:59.735" v="7080" actId="114"/>
-        <pc:sldMkLst>
-          <pc:docMk/>
-          <pc:sldMk cId="2202625363" sldId="259"/>
-        </pc:sldMkLst>
-        <pc:spChg chg="mod">
-          <ac:chgData name="laurent mayer" userId="c07e7b6061ff73d3" providerId="LiveId" clId="{7D450AA3-046A-48FC-ABB5-54D7AA942888}" dt="2021-08-27T15:05:06.824" v="1419" actId="207"/>
-          <ac:spMkLst>
-            <pc:docMk/>
-            <pc:sldMk cId="2202625363" sldId="259"/>
-            <ac:spMk id="2" creationId="{B69DE34F-85AA-4762-A0F0-6F3FC4CAD53F}"/>
-          </ac:spMkLst>
-        </pc:spChg>
-        <pc:spChg chg="mod">
-          <ac:chgData name="laurent mayer" userId="c07e7b6061ff73d3" providerId="LiveId" clId="{7D450AA3-046A-48FC-ABB5-54D7AA942888}" dt="2021-09-04T14:51:59.735" v="7080" actId="114"/>
-          <ac:spMkLst>
-            <pc:docMk/>
-            <pc:sldMk cId="2202625363" sldId="259"/>
-            <ac:spMk id="3" creationId="{B138CE73-9161-4578-BA3E-BD70BB118CFC}"/>
-          </ac:spMkLst>
-        </pc:spChg>
-      </pc:sldChg>
-      <pc:sldChg chg="modSp new mod modTransition">
-        <pc:chgData name="laurent mayer" userId="c07e7b6061ff73d3" providerId="LiveId" clId="{7D450AA3-046A-48FC-ABB5-54D7AA942888}" dt="2021-09-04T14:50:56.050" v="7078"/>
-        <pc:sldMkLst>
-          <pc:docMk/>
-          <pc:sldMk cId="4137575012" sldId="260"/>
-        </pc:sldMkLst>
-        <pc:spChg chg="mod">
-          <ac:chgData name="laurent mayer" userId="c07e7b6061ff73d3" providerId="LiveId" clId="{7D450AA3-046A-48FC-ABB5-54D7AA942888}" dt="2021-08-27T15:20:37.213" v="1792" actId="207"/>
-          <ac:spMkLst>
-            <pc:docMk/>
-            <pc:sldMk cId="4137575012" sldId="260"/>
-            <ac:spMk id="2" creationId="{94FED275-0C6E-4697-AABB-220F140BD4EB}"/>
-          </ac:spMkLst>
-        </pc:spChg>
-        <pc:spChg chg="mod">
-          <ac:chgData name="laurent mayer" userId="c07e7b6061ff73d3" providerId="LiveId" clId="{7D450AA3-046A-48FC-ABB5-54D7AA942888}" dt="2021-09-01T14:56:30.257" v="5496" actId="207"/>
-          <ac:spMkLst>
-            <pc:docMk/>
-            <pc:sldMk cId="4137575012" sldId="260"/>
-            <ac:spMk id="3" creationId="{E3CC8506-3F66-4901-B787-87052BBC1ABF}"/>
-          </ac:spMkLst>
-        </pc:spChg>
-      </pc:sldChg>
-      <pc:sldChg chg="modSp new mod modTransition">
-        <pc:chgData name="laurent mayer" userId="c07e7b6061ff73d3" providerId="LiveId" clId="{7D450AA3-046A-48FC-ABB5-54D7AA942888}" dt="2021-09-04T14:52:17.469" v="7084" actId="114"/>
-        <pc:sldMkLst>
-          <pc:docMk/>
-          <pc:sldMk cId="1159492700" sldId="261"/>
-        </pc:sldMkLst>
-        <pc:spChg chg="mod">
-          <ac:chgData name="laurent mayer" userId="c07e7b6061ff73d3" providerId="LiveId" clId="{7D450AA3-046A-48FC-ABB5-54D7AA942888}" dt="2021-08-27T15:39:20.520" v="2265" actId="122"/>
-          <ac:spMkLst>
-            <pc:docMk/>
-            <pc:sldMk cId="1159492700" sldId="261"/>
-            <ac:spMk id="2" creationId="{990B8BCD-94EC-4647-A581-1F0ECE0C2C5B}"/>
-          </ac:spMkLst>
-        </pc:spChg>
-        <pc:spChg chg="mod">
-          <ac:chgData name="laurent mayer" userId="c07e7b6061ff73d3" providerId="LiveId" clId="{7D450AA3-046A-48FC-ABB5-54D7AA942888}" dt="2021-09-04T14:52:17.469" v="7084" actId="114"/>
-          <ac:spMkLst>
-            <pc:docMk/>
-            <pc:sldMk cId="1159492700" sldId="261"/>
-            <ac:spMk id="3" creationId="{B3EB2172-8678-46E9-8D77-4F3693CC0272}"/>
-          </ac:spMkLst>
-        </pc:spChg>
-      </pc:sldChg>
-      <pc:sldChg chg="modSp new mod modTransition">
-        <pc:chgData name="laurent mayer" userId="c07e7b6061ff73d3" providerId="LiveId" clId="{7D450AA3-046A-48FC-ABB5-54D7AA942888}" dt="2021-09-04T14:50:56.050" v="7078"/>
-        <pc:sldMkLst>
-          <pc:docMk/>
-          <pc:sldMk cId="3060983021" sldId="262"/>
-        </pc:sldMkLst>
-        <pc:spChg chg="mod">
-          <ac:chgData name="laurent mayer" userId="c07e7b6061ff73d3" providerId="LiveId" clId="{7D450AA3-046A-48FC-ABB5-54D7AA942888}" dt="2021-09-01T08:51:23.499" v="2823" actId="20577"/>
-          <ac:spMkLst>
-            <pc:docMk/>
-            <pc:sldMk cId="3060983021" sldId="262"/>
-            <ac:spMk id="2" creationId="{AC092180-9033-4242-B0F7-CC5BA5A27E35}"/>
-          </ac:spMkLst>
-        </pc:spChg>
-        <pc:spChg chg="mod">
-          <ac:chgData name="laurent mayer" userId="c07e7b6061ff73d3" providerId="LiveId" clId="{7D450AA3-046A-48FC-ABB5-54D7AA942888}" dt="2021-09-01T09:25:02.636" v="3595" actId="20577"/>
-          <ac:spMkLst>
-            <pc:docMk/>
-            <pc:sldMk cId="3060983021" sldId="262"/>
-            <ac:spMk id="3" creationId="{C7BB12F4-C546-4A4B-BEA7-A47C53A09318}"/>
-          </ac:spMkLst>
-        </pc:spChg>
-      </pc:sldChg>
-      <pc:sldChg chg="modSp new mod modTransition">
-        <pc:chgData name="laurent mayer" userId="c07e7b6061ff73d3" providerId="LiveId" clId="{7D450AA3-046A-48FC-ABB5-54D7AA942888}" dt="2021-09-04T14:50:56.050" v="7078"/>
-        <pc:sldMkLst>
-          <pc:docMk/>
-          <pc:sldMk cId="783092640" sldId="263"/>
-        </pc:sldMkLst>
-        <pc:spChg chg="mod">
-          <ac:chgData name="laurent mayer" userId="c07e7b6061ff73d3" providerId="LiveId" clId="{7D450AA3-046A-48FC-ABB5-54D7AA942888}" dt="2021-09-01T09:14:45.011" v="3422" actId="20577"/>
-          <ac:spMkLst>
-            <pc:docMk/>
-            <pc:sldMk cId="783092640" sldId="263"/>
-            <ac:spMk id="2" creationId="{6CF85FE1-CD45-4060-A7AB-AFA2A0DBD413}"/>
-          </ac:spMkLst>
-        </pc:spChg>
-        <pc:spChg chg="mod">
-          <ac:chgData name="laurent mayer" userId="c07e7b6061ff73d3" providerId="LiveId" clId="{7D450AA3-046A-48FC-ABB5-54D7AA942888}" dt="2021-09-01T09:37:18.288" v="4270" actId="207"/>
-          <ac:spMkLst>
-            <pc:docMk/>
-            <pc:sldMk cId="783092640" sldId="263"/>
-            <ac:spMk id="3" creationId="{4E9D8150-D681-463F-AD42-D81B997FE06E}"/>
-          </ac:spMkLst>
-        </pc:spChg>
-      </pc:sldChg>
-      <pc:sldChg chg="modSp new mod modTransition">
-        <pc:chgData name="laurent mayer" userId="c07e7b6061ff73d3" providerId="LiveId" clId="{7D450AA3-046A-48FC-ABB5-54D7AA942888}" dt="2021-09-04T14:50:56.050" v="7078"/>
-        <pc:sldMkLst>
-          <pc:docMk/>
-          <pc:sldMk cId="1783145603" sldId="264"/>
-        </pc:sldMkLst>
-        <pc:spChg chg="mod">
-          <ac:chgData name="laurent mayer" userId="c07e7b6061ff73d3" providerId="LiveId" clId="{7D450AA3-046A-48FC-ABB5-54D7AA942888}" dt="2021-09-01T09:32:57.035" v="3964" actId="122"/>
-          <ac:spMkLst>
-            <pc:docMk/>
-            <pc:sldMk cId="1783145603" sldId="264"/>
-            <ac:spMk id="2" creationId="{79120007-E168-48EA-9C3E-968113B7D1BD}"/>
-          </ac:spMkLst>
-        </pc:spChg>
-        <pc:spChg chg="mod">
-          <ac:chgData name="laurent mayer" userId="c07e7b6061ff73d3" providerId="LiveId" clId="{7D450AA3-046A-48FC-ABB5-54D7AA942888}" dt="2021-09-01T14:34:21.998" v="4763" actId="20577"/>
-          <ac:spMkLst>
-            <pc:docMk/>
-            <pc:sldMk cId="1783145603" sldId="264"/>
-            <ac:spMk id="3" creationId="{E62F7E85-49FE-4501-A08C-C777C2C51FE5}"/>
-          </ac:spMkLst>
-        </pc:spChg>
-      </pc:sldChg>
-      <pc:sldChg chg="modSp new mod modTransition">
-        <pc:chgData name="laurent mayer" userId="c07e7b6061ff73d3" providerId="LiveId" clId="{7D450AA3-046A-48FC-ABB5-54D7AA942888}" dt="2021-09-04T14:50:56.050" v="7078"/>
-        <pc:sldMkLst>
-          <pc:docMk/>
-          <pc:sldMk cId="3936822647" sldId="265"/>
-        </pc:sldMkLst>
-        <pc:spChg chg="mod">
-          <ac:chgData name="laurent mayer" userId="c07e7b6061ff73d3" providerId="LiveId" clId="{7D450AA3-046A-48FC-ABB5-54D7AA942888}" dt="2021-09-01T14:22:19.114" v="4491" actId="122"/>
-          <ac:spMkLst>
-            <pc:docMk/>
-            <pc:sldMk cId="3936822647" sldId="265"/>
-            <ac:spMk id="2" creationId="{F4982826-6DD5-4F6D-87EB-A85AE753FE8F}"/>
-          </ac:spMkLst>
-        </pc:spChg>
-        <pc:spChg chg="mod">
-          <ac:chgData name="laurent mayer" userId="c07e7b6061ff73d3" providerId="LiveId" clId="{7D450AA3-046A-48FC-ABB5-54D7AA942888}" dt="2021-09-01T14:39:42.450" v="4886" actId="20577"/>
-          <ac:spMkLst>
-            <pc:docMk/>
-            <pc:sldMk cId="3936822647" sldId="265"/>
-            <ac:spMk id="3" creationId="{4FAC249F-1A11-43F5-8650-EEE20D6AEC22}"/>
-          </ac:spMkLst>
-        </pc:spChg>
-      </pc:sldChg>
-      <pc:sldChg chg="modSp new mod modTransition">
-        <pc:chgData name="laurent mayer" userId="c07e7b6061ff73d3" providerId="LiveId" clId="{7D450AA3-046A-48FC-ABB5-54D7AA942888}" dt="2021-09-04T14:50:56.050" v="7078"/>
-        <pc:sldMkLst>
-          <pc:docMk/>
-          <pc:sldMk cId="1191687584" sldId="266"/>
-        </pc:sldMkLst>
-        <pc:spChg chg="mod">
-          <ac:chgData name="laurent mayer" userId="c07e7b6061ff73d3" providerId="LiveId" clId="{7D450AA3-046A-48FC-ABB5-54D7AA942888}" dt="2021-09-01T16:15:20.759" v="6301" actId="20577"/>
-          <ac:spMkLst>
-            <pc:docMk/>
-            <pc:sldMk cId="1191687584" sldId="266"/>
-            <ac:spMk id="2" creationId="{FC3E1DB7-EB92-4642-8C3B-4A646700F312}"/>
-          </ac:spMkLst>
-        </pc:spChg>
-        <pc:spChg chg="mod">
-          <ac:chgData name="laurent mayer" userId="c07e7b6061ff73d3" providerId="LiveId" clId="{7D450AA3-046A-48FC-ABB5-54D7AA942888}" dt="2021-09-01T16:17:10.929" v="6342" actId="5793"/>
-          <ac:spMkLst>
-            <pc:docMk/>
-            <pc:sldMk cId="1191687584" sldId="266"/>
-            <ac:spMk id="3" creationId="{B251BDEC-B8AF-4AFA-A4D8-F7D86A8D8DB2}"/>
-          </ac:spMkLst>
-        </pc:spChg>
-      </pc:sldChg>
-      <pc:sldChg chg="modSp new mod modTransition">
-        <pc:chgData name="laurent mayer" userId="c07e7b6061ff73d3" providerId="LiveId" clId="{7D450AA3-046A-48FC-ABB5-54D7AA942888}" dt="2021-09-04T14:50:56.050" v="7078"/>
-        <pc:sldMkLst>
-          <pc:docMk/>
-          <pc:sldMk cId="2942347136" sldId="267"/>
-        </pc:sldMkLst>
-        <pc:spChg chg="mod">
-          <ac:chgData name="laurent mayer" userId="c07e7b6061ff73d3" providerId="LiveId" clId="{7D450AA3-046A-48FC-ABB5-54D7AA942888}" dt="2021-09-01T14:58:09.163" v="5515" actId="20577"/>
-          <ac:spMkLst>
-            <pc:docMk/>
-            <pc:sldMk cId="2942347136" sldId="267"/>
-            <ac:spMk id="2" creationId="{D1510692-A156-4A71-A743-9426B6300487}"/>
-          </ac:spMkLst>
-        </pc:spChg>
-        <pc:spChg chg="mod">
-          <ac:chgData name="laurent mayer" userId="c07e7b6061ff73d3" providerId="LiveId" clId="{7D450AA3-046A-48FC-ABB5-54D7AA942888}" dt="2021-09-01T15:15:49.688" v="6001" actId="20577"/>
-          <ac:spMkLst>
-            <pc:docMk/>
-            <pc:sldMk cId="2942347136" sldId="267"/>
-            <ac:spMk id="3" creationId="{39844823-2ACF-4C69-98BF-F99FDF793C32}"/>
-          </ac:spMkLst>
-        </pc:spChg>
-      </pc:sldChg>
-      <pc:sldChg chg="addSp delSp modSp new mod modTransition setBg setClrOvrMap chgLayout">
-        <pc:chgData name="laurent mayer" userId="c07e7b6061ff73d3" providerId="LiveId" clId="{7D450AA3-046A-48FC-ABB5-54D7AA942888}" dt="2021-09-04T14:50:56.050" v="7078"/>
-        <pc:sldMkLst>
-          <pc:docMk/>
-          <pc:sldMk cId="4067643213" sldId="268"/>
-        </pc:sldMkLst>
-        <pc:spChg chg="mod ord">
-          <ac:chgData name="laurent mayer" userId="c07e7b6061ff73d3" providerId="LiveId" clId="{7D450AA3-046A-48FC-ABB5-54D7AA942888}" dt="2021-09-01T15:38:36.261" v="6185" actId="26606"/>
-          <ac:spMkLst>
-            <pc:docMk/>
-            <pc:sldMk cId="4067643213" sldId="268"/>
-            <ac:spMk id="2" creationId="{B6086930-A2A3-4777-970B-8CC040FA8F29}"/>
-          </ac:spMkLst>
-        </pc:spChg>
-        <pc:spChg chg="del mod">
-          <ac:chgData name="laurent mayer" userId="c07e7b6061ff73d3" providerId="LiveId" clId="{7D450AA3-046A-48FC-ABB5-54D7AA942888}" dt="2021-09-01T15:35:09.227" v="6119" actId="700"/>
-          <ac:spMkLst>
-            <pc:docMk/>
-            <pc:sldMk cId="4067643213" sldId="268"/>
-            <ac:spMk id="3" creationId="{D155106B-F8ED-4B34-9A4E-BE6BD31C99B7}"/>
-          </ac:spMkLst>
-        </pc:spChg>
-        <pc:spChg chg="add mod ord">
-          <ac:chgData name="laurent mayer" userId="c07e7b6061ff73d3" providerId="LiveId" clId="{7D450AA3-046A-48FC-ABB5-54D7AA942888}" dt="2021-09-01T15:44:15.032" v="6213" actId="115"/>
-          <ac:spMkLst>
-            <pc:docMk/>
-            <pc:sldMk cId="4067643213" sldId="268"/>
-            <ac:spMk id="4" creationId="{25666D63-68B5-49D9-8E5E-734E8B0C5106}"/>
-          </ac:spMkLst>
-        </pc:spChg>
-        <pc:spChg chg="add del">
-          <ac:chgData name="laurent mayer" userId="c07e7b6061ff73d3" providerId="LiveId" clId="{7D450AA3-046A-48FC-ABB5-54D7AA942888}" dt="2021-09-01T15:38:04.935" v="6173" actId="26606"/>
-          <ac:spMkLst>
-            <pc:docMk/>
-            <pc:sldMk cId="4067643213" sldId="268"/>
-            <ac:spMk id="10" creationId="{F13C74B1-5B17-4795-BED0-7140497B445A}"/>
-          </ac:spMkLst>
-        </pc:spChg>
-        <pc:spChg chg="add del">
-          <ac:chgData name="laurent mayer" userId="c07e7b6061ff73d3" providerId="LiveId" clId="{7D450AA3-046A-48FC-ABB5-54D7AA942888}" dt="2021-09-01T15:38:04.935" v="6173" actId="26606"/>
-          <ac:spMkLst>
-            <pc:docMk/>
-            <pc:sldMk cId="4067643213" sldId="268"/>
-            <ac:spMk id="11" creationId="{D4974D33-8DC5-464E-8C6D-BE58F0669C17}"/>
-          </ac:spMkLst>
-        </pc:spChg>
-        <pc:spChg chg="add del">
-          <ac:chgData name="laurent mayer" userId="c07e7b6061ff73d3" providerId="LiveId" clId="{7D450AA3-046A-48FC-ABB5-54D7AA942888}" dt="2021-09-01T15:37:52.497" v="6169" actId="26606"/>
-          <ac:spMkLst>
-            <pc:docMk/>
-            <pc:sldMk cId="4067643213" sldId="268"/>
-            <ac:spMk id="13" creationId="{F13C74B1-5B17-4795-BED0-7140497B445A}"/>
-          </ac:spMkLst>
-        </pc:spChg>
-        <pc:spChg chg="add del">
-          <ac:chgData name="laurent mayer" userId="c07e7b6061ff73d3" providerId="LiveId" clId="{7D450AA3-046A-48FC-ABB5-54D7AA942888}" dt="2021-09-01T15:38:08.288" v="6175" actId="26606"/>
-          <ac:spMkLst>
-            <pc:docMk/>
-            <pc:sldMk cId="4067643213" sldId="268"/>
-            <ac:spMk id="14" creationId="{A81E7530-396C-45F0-92F4-A885648D1631}"/>
-          </ac:spMkLst>
-        </pc:spChg>
-        <pc:spChg chg="add del">
-          <ac:chgData name="laurent mayer" userId="c07e7b6061ff73d3" providerId="LiveId" clId="{7D450AA3-046A-48FC-ABB5-54D7AA942888}" dt="2021-09-01T15:37:52.497" v="6169" actId="26606"/>
-          <ac:spMkLst>
-            <pc:docMk/>
-            <pc:sldMk cId="4067643213" sldId="268"/>
-            <ac:spMk id="15" creationId="{D4974D33-8DC5-464E-8C6D-BE58F0669C17}"/>
-          </ac:spMkLst>
-        </pc:spChg>
-        <pc:spChg chg="add del">
-          <ac:chgData name="laurent mayer" userId="c07e7b6061ff73d3" providerId="LiveId" clId="{7D450AA3-046A-48FC-ABB5-54D7AA942888}" dt="2021-09-01T15:38:08.288" v="6175" actId="26606"/>
-          <ac:spMkLst>
-            <pc:docMk/>
-            <pc:sldMk cId="4067643213" sldId="268"/>
-            <ac:spMk id="16" creationId="{7316481C-0A49-4796-812B-0D64F063B720}"/>
-          </ac:spMkLst>
-        </pc:spChg>
-        <pc:spChg chg="add del">
-          <ac:chgData name="laurent mayer" userId="c07e7b6061ff73d3" providerId="LiveId" clId="{7D450AA3-046A-48FC-ABB5-54D7AA942888}" dt="2021-09-01T15:38:08.288" v="6175" actId="26606"/>
-          <ac:spMkLst>
-            <pc:docMk/>
-            <pc:sldMk cId="4067643213" sldId="268"/>
-            <ac:spMk id="17" creationId="{A5271697-90F1-4A23-8EF2-0179F2EAFACB}"/>
-          </ac:spMkLst>
-        </pc:spChg>
-        <pc:spChg chg="add del">
-          <ac:chgData name="laurent mayer" userId="c07e7b6061ff73d3" providerId="LiveId" clId="{7D450AA3-046A-48FC-ABB5-54D7AA942888}" dt="2021-09-01T15:38:08.288" v="6175" actId="26606"/>
-          <ac:spMkLst>
-            <pc:docMk/>
-            <pc:sldMk cId="4067643213" sldId="268"/>
-            <ac:spMk id="41" creationId="{D9F5512A-48E1-4C07-B75E-3CCC517B6804}"/>
-          </ac:spMkLst>
-        </pc:spChg>
-        <pc:spChg chg="add del">
-          <ac:chgData name="laurent mayer" userId="c07e7b6061ff73d3" providerId="LiveId" clId="{7D450AA3-046A-48FC-ABB5-54D7AA942888}" dt="2021-09-01T15:38:12.415" v="6177" actId="26606"/>
-          <ac:spMkLst>
-            <pc:docMk/>
-            <pc:sldMk cId="4067643213" sldId="268"/>
-            <ac:spMk id="43" creationId="{04812C46-200A-4DEB-A05E-3ED6C68C2387}"/>
-          </ac:spMkLst>
-        </pc:spChg>
-        <pc:spChg chg="add del">
-          <ac:chgData name="laurent mayer" userId="c07e7b6061ff73d3" providerId="LiveId" clId="{7D450AA3-046A-48FC-ABB5-54D7AA942888}" dt="2021-09-01T15:38:12.415" v="6177" actId="26606"/>
-          <ac:spMkLst>
-            <pc:docMk/>
-            <pc:sldMk cId="4067643213" sldId="268"/>
-            <ac:spMk id="44" creationId="{D1EA859B-E555-4109-94F3-6700E046E008}"/>
-          </ac:spMkLst>
-        </pc:spChg>
-        <pc:spChg chg="add del">
-          <ac:chgData name="laurent mayer" userId="c07e7b6061ff73d3" providerId="LiveId" clId="{7D450AA3-046A-48FC-ABB5-54D7AA942888}" dt="2021-09-01T15:38:18.134" v="6179" actId="26606"/>
-          <ac:spMkLst>
-            <pc:docMk/>
-            <pc:sldMk cId="4067643213" sldId="268"/>
-            <ac:spMk id="46" creationId="{9B76D444-2756-434F-AE61-96D69830C13E}"/>
-          </ac:spMkLst>
-        </pc:spChg>
-        <pc:spChg chg="add del">
-          <ac:chgData name="laurent mayer" userId="c07e7b6061ff73d3" providerId="LiveId" clId="{7D450AA3-046A-48FC-ABB5-54D7AA942888}" dt="2021-09-01T15:38:18.134" v="6179" actId="26606"/>
-          <ac:spMkLst>
-            <pc:docMk/>
-            <pc:sldMk cId="4067643213" sldId="268"/>
-            <ac:spMk id="47" creationId="{A27B6159-7734-4564-9E0F-C4BC43C36E52}"/>
-          </ac:spMkLst>
-        </pc:spChg>
-        <pc:spChg chg="add del">
-          <ac:chgData name="laurent mayer" userId="c07e7b6061ff73d3" providerId="LiveId" clId="{7D450AA3-046A-48FC-ABB5-54D7AA942888}" dt="2021-09-01T15:38:34.753" v="6183" actId="26606"/>
-          <ac:spMkLst>
-            <pc:docMk/>
-            <pc:sldMk cId="4067643213" sldId="268"/>
-            <ac:spMk id="50" creationId="{3CD9DF72-87A3-404E-A828-84CBF11A8303}"/>
-          </ac:spMkLst>
-        </pc:spChg>
-        <pc:grpChg chg="add del">
-          <ac:chgData name="laurent mayer" userId="c07e7b6061ff73d3" providerId="LiveId" clId="{7D450AA3-046A-48FC-ABB5-54D7AA942888}" dt="2021-09-01T15:38:08.288" v="6175" actId="26606"/>
-          <ac:grpSpMkLst>
-            <pc:docMk/>
-            <pc:sldMk cId="4067643213" sldId="268"/>
-            <ac:grpSpMk id="19" creationId="{81DE8B58-F373-409E-A253-4380A66091D4}"/>
-          </ac:grpSpMkLst>
-        </pc:grpChg>
-        <pc:picChg chg="add del mod">
-          <ac:chgData name="laurent mayer" userId="c07e7b6061ff73d3" providerId="LiveId" clId="{7D450AA3-046A-48FC-ABB5-54D7AA942888}" dt="2021-09-01T15:37:09.087" v="6162" actId="21"/>
-          <ac:picMkLst>
-            <pc:docMk/>
-            <pc:sldMk cId="4067643213" sldId="268"/>
-            <ac:picMk id="6" creationId="{DC8B94F0-640F-4567-9B22-E2AD1766B5B7}"/>
-          </ac:picMkLst>
-        </pc:picChg>
-        <pc:picChg chg="add del mod">
-          <ac:chgData name="laurent mayer" userId="c07e7b6061ff73d3" providerId="LiveId" clId="{7D450AA3-046A-48FC-ABB5-54D7AA942888}" dt="2021-09-01T15:37:35.463" v="6166"/>
-          <ac:picMkLst>
-            <pc:docMk/>
-            <pc:sldMk cId="4067643213" sldId="268"/>
-            <ac:picMk id="7" creationId="{4326F5C5-D73C-48AB-95D6-10BCF6DE84BB}"/>
-          </ac:picMkLst>
-        </pc:picChg>
-        <pc:picChg chg="add del mod ord">
-          <ac:chgData name="laurent mayer" userId="c07e7b6061ff73d3" providerId="LiveId" clId="{7D450AA3-046A-48FC-ABB5-54D7AA942888}" dt="2021-09-01T15:38:50.540" v="6188"/>
-          <ac:picMkLst>
-            <pc:docMk/>
-            <pc:sldMk cId="4067643213" sldId="268"/>
-            <ac:picMk id="8" creationId="{BE85CFBA-4C68-4797-893C-301683BCEA1D}"/>
-          </ac:picMkLst>
-        </pc:picChg>
-        <pc:picChg chg="add mod">
-          <ac:chgData name="laurent mayer" userId="c07e7b6061ff73d3" providerId="LiveId" clId="{7D450AA3-046A-48FC-ABB5-54D7AA942888}" dt="2021-09-01T15:39:04.508" v="6192" actId="14100"/>
-          <ac:picMkLst>
-            <pc:docMk/>
-            <pc:sldMk cId="4067643213" sldId="268"/>
-            <ac:picMk id="45" creationId="{4F9A4577-216D-4708-8CB9-C5CBF9091F38}"/>
-          </ac:picMkLst>
-        </pc:picChg>
-        <pc:cxnChg chg="add del">
-          <ac:chgData name="laurent mayer" userId="c07e7b6061ff73d3" providerId="LiveId" clId="{7D450AA3-046A-48FC-ABB5-54D7AA942888}" dt="2021-09-01T15:38:18.134" v="6179" actId="26606"/>
-          <ac:cxnSpMkLst>
-            <pc:docMk/>
-            <pc:sldMk cId="4067643213" sldId="268"/>
-            <ac:cxnSpMk id="48" creationId="{E2FFB46B-05BC-4950-B18A-9593FDAE6ED7}"/>
-          </ac:cxnSpMkLst>
-        </pc:cxnChg>
-        <pc:cxnChg chg="add del">
-          <ac:chgData name="laurent mayer" userId="c07e7b6061ff73d3" providerId="LiveId" clId="{7D450AA3-046A-48FC-ABB5-54D7AA942888}" dt="2021-09-01T15:38:34.753" v="6183" actId="26606"/>
-          <ac:cxnSpMkLst>
-            <pc:docMk/>
-            <pc:sldMk cId="4067643213" sldId="268"/>
-            <ac:cxnSpMk id="51" creationId="{20E3A342-4D61-4E3F-AF90-1AB42AEB96CC}"/>
-          </ac:cxnSpMkLst>
-        </pc:cxnChg>
-      </pc:sldChg>
-      <pc:sldChg chg="addSp delSp modSp new del mod modClrScheme chgLayout">
-        <pc:chgData name="laurent mayer" userId="c07e7b6061ff73d3" providerId="LiveId" clId="{7D450AA3-046A-48FC-ABB5-54D7AA942888}" dt="2021-09-01T15:32:04.174" v="6088" actId="2696"/>
-        <pc:sldMkLst>
-          <pc:docMk/>
-          <pc:sldMk cId="4132613180" sldId="268"/>
-        </pc:sldMkLst>
-        <pc:spChg chg="mod ord">
-          <ac:chgData name="laurent mayer" userId="c07e7b6061ff73d3" providerId="LiveId" clId="{7D450AA3-046A-48FC-ABB5-54D7AA942888}" dt="2021-09-01T15:19:44.099" v="6054" actId="700"/>
-          <ac:spMkLst>
-            <pc:docMk/>
-            <pc:sldMk cId="4132613180" sldId="268"/>
-            <ac:spMk id="2" creationId="{0B0C382D-BD6E-473A-88DB-8627CCC0AF6E}"/>
-          </ac:spMkLst>
-        </pc:spChg>
-        <pc:spChg chg="del mod ord">
-          <ac:chgData name="laurent mayer" userId="c07e7b6061ff73d3" providerId="LiveId" clId="{7D450AA3-046A-48FC-ABB5-54D7AA942888}" dt="2021-09-01T15:19:11.670" v="6030" actId="700"/>
-          <ac:spMkLst>
-            <pc:docMk/>
-            <pc:sldMk cId="4132613180" sldId="268"/>
-            <ac:spMk id="3" creationId="{96F5B4EB-7EEC-4887-B838-AF24604D64C8}"/>
-          </ac:spMkLst>
-        </pc:spChg>
-        <pc:spChg chg="add mod ord">
-          <ac:chgData name="laurent mayer" userId="c07e7b6061ff73d3" providerId="LiveId" clId="{7D450AA3-046A-48FC-ABB5-54D7AA942888}" dt="2021-09-01T15:19:47.848" v="6055" actId="21"/>
-          <ac:spMkLst>
-            <pc:docMk/>
-            <pc:sldMk cId="4132613180" sldId="268"/>
-            <ac:spMk id="4" creationId="{E8A7B34B-87A9-4989-B807-B1F1FCF12E78}"/>
-          </ac:spMkLst>
-        </pc:spChg>
-        <pc:spChg chg="add mod ord">
-          <ac:chgData name="laurent mayer" userId="c07e7b6061ff73d3" providerId="LiveId" clId="{7D450AA3-046A-48FC-ABB5-54D7AA942888}" dt="2021-09-01T15:20:25.137" v="6085" actId="6549"/>
-          <ac:spMkLst>
-            <pc:docMk/>
-            <pc:sldMk cId="4132613180" sldId="268"/>
-            <ac:spMk id="5" creationId="{686C560E-B77B-43F8-8627-10A6212E5B8E}"/>
-          </ac:spMkLst>
-        </pc:spChg>
-        <pc:spChg chg="add mod ord">
-          <ac:chgData name="laurent mayer" userId="c07e7b6061ff73d3" providerId="LiveId" clId="{7D450AA3-046A-48FC-ABB5-54D7AA942888}" dt="2021-09-01T15:20:33.149" v="6086" actId="207"/>
-          <ac:spMkLst>
-            <pc:docMk/>
-            <pc:sldMk cId="4132613180" sldId="268"/>
-            <ac:spMk id="6" creationId="{FAF58B82-FE78-4E03-B939-DDE28950FF86}"/>
-          </ac:spMkLst>
-        </pc:spChg>
-        <pc:spChg chg="add mod ord">
-          <ac:chgData name="laurent mayer" userId="c07e7b6061ff73d3" providerId="LiveId" clId="{7D450AA3-046A-48FC-ABB5-54D7AA942888}" dt="2021-09-01T15:20:37.538" v="6087" actId="207"/>
-          <ac:spMkLst>
-            <pc:docMk/>
-            <pc:sldMk cId="4132613180" sldId="268"/>
-            <ac:spMk id="7" creationId="{26454733-DFBA-4A19-A96D-8F46384E872B}"/>
-          </ac:spMkLst>
-        </pc:spChg>
-      </pc:sldChg>
-      <pc:sldChg chg="addSp delSp modSp new mod modTransition modClrScheme chgLayout">
-        <pc:chgData name="laurent mayer" userId="c07e7b6061ff73d3" providerId="LiveId" clId="{7D450AA3-046A-48FC-ABB5-54D7AA942888}" dt="2021-09-04T14:50:56.050" v="7078"/>
-        <pc:sldMkLst>
-          <pc:docMk/>
-          <pc:sldMk cId="2491103863" sldId="269"/>
-        </pc:sldMkLst>
-        <pc:spChg chg="mod ord">
-          <ac:chgData name="laurent mayer" userId="c07e7b6061ff73d3" providerId="LiveId" clId="{7D450AA3-046A-48FC-ABB5-54D7AA942888}" dt="2021-09-01T15:43:47.253" v="6197" actId="700"/>
-          <ac:spMkLst>
-            <pc:docMk/>
-            <pc:sldMk cId="2491103863" sldId="269"/>
-            <ac:spMk id="2" creationId="{18D3F37E-2258-4A0E-9913-AA45B1116389}"/>
-          </ac:spMkLst>
-        </pc:spChg>
-        <pc:spChg chg="del mod ord">
-          <ac:chgData name="laurent mayer" userId="c07e7b6061ff73d3" providerId="LiveId" clId="{7D450AA3-046A-48FC-ABB5-54D7AA942888}" dt="2021-09-01T15:43:47.253" v="6197" actId="700"/>
-          <ac:spMkLst>
-            <pc:docMk/>
-            <pc:sldMk cId="2491103863" sldId="269"/>
-            <ac:spMk id="3" creationId="{FDDDE266-1951-4656-8AC8-B3E734CF0BFC}"/>
-          </ac:spMkLst>
-        </pc:spChg>
-        <pc:spChg chg="add mod ord">
-          <ac:chgData name="laurent mayer" userId="c07e7b6061ff73d3" providerId="LiveId" clId="{7D450AA3-046A-48FC-ABB5-54D7AA942888}" dt="2021-09-01T15:44:23.583" v="6214" actId="122"/>
-          <ac:spMkLst>
-            <pc:docMk/>
-            <pc:sldMk cId="2491103863" sldId="269"/>
-            <ac:spMk id="4" creationId="{2016EE66-E812-4A37-BA78-4E46640E905F}"/>
-          </ac:spMkLst>
-        </pc:spChg>
-        <pc:spChg chg="add del mod ord">
-          <ac:chgData name="laurent mayer" userId="c07e7b6061ff73d3" providerId="LiveId" clId="{7D450AA3-046A-48FC-ABB5-54D7AA942888}" dt="2021-09-01T15:48:22.785" v="6242"/>
-          <ac:spMkLst>
-            <pc:docMk/>
-            <pc:sldMk cId="2491103863" sldId="269"/>
-            <ac:spMk id="5" creationId="{2B9F4EAF-2A0A-47BB-9E9C-A0E5121DFEC9}"/>
-          </ac:spMkLst>
-        </pc:spChg>
-        <pc:spChg chg="add mod ord">
-          <ac:chgData name="laurent mayer" userId="c07e7b6061ff73d3" providerId="LiveId" clId="{7D450AA3-046A-48FC-ABB5-54D7AA942888}" dt="2021-09-01T15:44:54.041" v="6239" actId="122"/>
-          <ac:spMkLst>
-            <pc:docMk/>
-            <pc:sldMk cId="2491103863" sldId="269"/>
-            <ac:spMk id="6" creationId="{2509E405-4E49-4731-9225-C2195CB129EB}"/>
-          </ac:spMkLst>
-        </pc:spChg>
-        <pc:spChg chg="add del mod ord">
-          <ac:chgData name="laurent mayer" userId="c07e7b6061ff73d3" providerId="LiveId" clId="{7D450AA3-046A-48FC-ABB5-54D7AA942888}" dt="2021-09-01T15:51:42.482" v="6245" actId="22"/>
-          <ac:spMkLst>
-            <pc:docMk/>
-            <pc:sldMk cId="2491103863" sldId="269"/>
-            <ac:spMk id="7" creationId="{7B503B2D-3D08-4394-9FF4-EB580EF0C2EF}"/>
-          </ac:spMkLst>
-        </pc:spChg>
-        <pc:picChg chg="add mod">
-          <ac:chgData name="laurent mayer" userId="c07e7b6061ff73d3" providerId="LiveId" clId="{7D450AA3-046A-48FC-ABB5-54D7AA942888}" dt="2021-09-01T15:48:25.366" v="6243" actId="27614"/>
-          <ac:picMkLst>
-            <pc:docMk/>
-            <pc:sldMk cId="2491103863" sldId="269"/>
-            <ac:picMk id="9" creationId="{D73CC001-4487-4E95-851B-380DA536E10C}"/>
-          </ac:picMkLst>
-        </pc:picChg>
-        <pc:picChg chg="add mod ord">
-          <ac:chgData name="laurent mayer" userId="c07e7b6061ff73d3" providerId="LiveId" clId="{7D450AA3-046A-48FC-ABB5-54D7AA942888}" dt="2021-09-01T15:51:42.482" v="6245" actId="22"/>
-          <ac:picMkLst>
-            <pc:docMk/>
-            <pc:sldMk cId="2491103863" sldId="269"/>
-            <ac:picMk id="11" creationId="{5B1E84A4-61D7-4F44-892E-804C47AFE6DF}"/>
-          </ac:picMkLst>
-        </pc:picChg>
-      </pc:sldChg>
-      <pc:sldChg chg="new del">
-        <pc:chgData name="laurent mayer" userId="c07e7b6061ff73d3" providerId="LiveId" clId="{7D450AA3-046A-48FC-ABB5-54D7AA942888}" dt="2021-09-01T15:55:09" v="6247" actId="47"/>
-        <pc:sldMkLst>
-          <pc:docMk/>
-          <pc:sldMk cId="795942341" sldId="270"/>
-        </pc:sldMkLst>
-      </pc:sldChg>
-      <pc:sldChg chg="addSp delSp modSp add mod modTransition">
-        <pc:chgData name="laurent mayer" userId="c07e7b6061ff73d3" providerId="LiveId" clId="{7D450AA3-046A-48FC-ABB5-54D7AA942888}" dt="2021-09-04T14:50:56.050" v="7078"/>
-        <pc:sldMkLst>
-          <pc:docMk/>
-          <pc:sldMk cId="2568864071" sldId="270"/>
-        </pc:sldMkLst>
-        <pc:spChg chg="add del mod">
-          <ac:chgData name="laurent mayer" userId="c07e7b6061ff73d3" providerId="LiveId" clId="{7D450AA3-046A-48FC-ABB5-54D7AA942888}" dt="2021-09-01T15:59:51.363" v="6261" actId="22"/>
-          <ac:spMkLst>
-            <pc:docMk/>
-            <pc:sldMk cId="2568864071" sldId="270"/>
-            <ac:spMk id="5" creationId="{D524F5F1-A640-44CB-9AB1-05B5420B9746}"/>
-          </ac:spMkLst>
-        </pc:spChg>
-        <pc:spChg chg="mod">
-          <ac:chgData name="laurent mayer" userId="c07e7b6061ff73d3" providerId="LiveId" clId="{7D450AA3-046A-48FC-ABB5-54D7AA942888}" dt="2021-09-01T15:55:23.285" v="6258" actId="20577"/>
-          <ac:spMkLst>
-            <pc:docMk/>
-            <pc:sldMk cId="2568864071" sldId="270"/>
-            <ac:spMk id="6" creationId="{2509E405-4E49-4731-9225-C2195CB129EB}"/>
-          </ac:spMkLst>
-        </pc:spChg>
-        <pc:picChg chg="add mod ord">
-          <ac:chgData name="laurent mayer" userId="c07e7b6061ff73d3" providerId="LiveId" clId="{7D450AA3-046A-48FC-ABB5-54D7AA942888}" dt="2021-09-01T15:59:51.363" v="6261" actId="22"/>
-          <ac:picMkLst>
-            <pc:docMk/>
-            <pc:sldMk cId="2568864071" sldId="270"/>
-            <ac:picMk id="8" creationId="{F155B93A-BBA1-4ED9-A7FF-5DB6AADCC176}"/>
-          </ac:picMkLst>
-        </pc:picChg>
-        <pc:picChg chg="del">
-          <ac:chgData name="laurent mayer" userId="c07e7b6061ff73d3" providerId="LiveId" clId="{7D450AA3-046A-48FC-ABB5-54D7AA942888}" dt="2021-09-01T15:55:27.935" v="6259" actId="478"/>
-          <ac:picMkLst>
-            <pc:docMk/>
-            <pc:sldMk cId="2568864071" sldId="270"/>
-            <ac:picMk id="11" creationId="{5B1E84A4-61D7-4F44-892E-804C47AFE6DF}"/>
-          </ac:picMkLst>
-        </pc:picChg>
-      </pc:sldChg>
-      <pc:sldChg chg="addSp delSp modSp new mod modTransition modClrScheme chgLayout">
-        <pc:chgData name="laurent mayer" userId="c07e7b6061ff73d3" providerId="LiveId" clId="{7D450AA3-046A-48FC-ABB5-54D7AA942888}" dt="2021-09-04T14:50:56.050" v="7078"/>
-        <pc:sldMkLst>
-          <pc:docMk/>
-          <pc:sldMk cId="2285449741" sldId="271"/>
-        </pc:sldMkLst>
-        <pc:spChg chg="del mod ord">
-          <ac:chgData name="laurent mayer" userId="c07e7b6061ff73d3" providerId="LiveId" clId="{7D450AA3-046A-48FC-ABB5-54D7AA942888}" dt="2021-09-01T16:12:10.397" v="6263" actId="700"/>
-          <ac:spMkLst>
-            <pc:docMk/>
-            <pc:sldMk cId="2285449741" sldId="271"/>
-            <ac:spMk id="2" creationId="{2A66E388-5491-4331-AA9A-5C94BE7D569D}"/>
-          </ac:spMkLst>
-        </pc:spChg>
-        <pc:spChg chg="del">
-          <ac:chgData name="laurent mayer" userId="c07e7b6061ff73d3" providerId="LiveId" clId="{7D450AA3-046A-48FC-ABB5-54D7AA942888}" dt="2021-09-01T16:12:10.397" v="6263" actId="700"/>
-          <ac:spMkLst>
-            <pc:docMk/>
-            <pc:sldMk cId="2285449741" sldId="271"/>
-            <ac:spMk id="3" creationId="{DFBB8716-2A2E-47B5-917B-74F6DF110CEC}"/>
-          </ac:spMkLst>
-        </pc:spChg>
-        <pc:spChg chg="del mod ord">
-          <ac:chgData name="laurent mayer" userId="c07e7b6061ff73d3" providerId="LiveId" clId="{7D450AA3-046A-48FC-ABB5-54D7AA942888}" dt="2021-09-01T16:12:10.397" v="6263" actId="700"/>
-          <ac:spMkLst>
-            <pc:docMk/>
-            <pc:sldMk cId="2285449741" sldId="271"/>
-            <ac:spMk id="4" creationId="{4B1BC97D-8844-4D73-9A09-500CB65B087E}"/>
-          </ac:spMkLst>
-        </pc:spChg>
-        <pc:spChg chg="del">
-          <ac:chgData name="laurent mayer" userId="c07e7b6061ff73d3" providerId="LiveId" clId="{7D450AA3-046A-48FC-ABB5-54D7AA942888}" dt="2021-09-01T16:12:10.397" v="6263" actId="700"/>
-          <ac:spMkLst>
-            <pc:docMk/>
-            <pc:sldMk cId="2285449741" sldId="271"/>
-            <ac:spMk id="5" creationId="{C275F679-7730-4329-9DE8-D8F95B2C2F34}"/>
-          </ac:spMkLst>
-        </pc:spChg>
-        <pc:spChg chg="del">
-          <ac:chgData name="laurent mayer" userId="c07e7b6061ff73d3" providerId="LiveId" clId="{7D450AA3-046A-48FC-ABB5-54D7AA942888}" dt="2021-09-01T16:12:10.397" v="6263" actId="700"/>
-          <ac:spMkLst>
-            <pc:docMk/>
-            <pc:sldMk cId="2285449741" sldId="271"/>
-            <ac:spMk id="6" creationId="{E1711B2A-E7AB-40EA-B098-9A418C863CF1}"/>
-          </ac:spMkLst>
-        </pc:spChg>
-        <pc:spChg chg="add mod ord">
-          <ac:chgData name="laurent mayer" userId="c07e7b6061ff73d3" providerId="LiveId" clId="{7D450AA3-046A-48FC-ABB5-54D7AA942888}" dt="2021-09-01T16:13:07.129" v="6286" actId="27636"/>
-          <ac:spMkLst>
-            <pc:docMk/>
-            <pc:sldMk cId="2285449741" sldId="271"/>
-            <ac:spMk id="7" creationId="{67E6E36D-86CE-47D1-954A-757E28D92C6B}"/>
-          </ac:spMkLst>
-        </pc:spChg>
-        <pc:spChg chg="add del mod ord">
-          <ac:chgData name="laurent mayer" userId="c07e7b6061ff73d3" providerId="LiveId" clId="{7D450AA3-046A-48FC-ABB5-54D7AA942888}" dt="2021-09-01T16:12:13.759" v="6264" actId="22"/>
-          <ac:spMkLst>
-            <pc:docMk/>
-            <pc:sldMk cId="2285449741" sldId="271"/>
-            <ac:spMk id="8" creationId="{9F15E310-A8AF-4247-864A-8A308095BDDD}"/>
-          </ac:spMkLst>
-        </pc:spChg>
-        <pc:picChg chg="add mod ord">
-          <ac:chgData name="laurent mayer" userId="c07e7b6061ff73d3" providerId="LiveId" clId="{7D450AA3-046A-48FC-ABB5-54D7AA942888}" dt="2021-09-01T16:13:10.540" v="6287" actId="14100"/>
-          <ac:picMkLst>
-            <pc:docMk/>
-            <pc:sldMk cId="2285449741" sldId="271"/>
-            <ac:picMk id="10" creationId="{C0AE6393-3337-4320-BB07-64527C83C3DE}"/>
-          </ac:picMkLst>
-        </pc:picChg>
-      </pc:sldChg>
-      <pc:sldChg chg="addSp delSp modSp new mod modTransition">
-        <pc:chgData name="laurent mayer" userId="c07e7b6061ff73d3" providerId="LiveId" clId="{7D450AA3-046A-48FC-ABB5-54D7AA942888}" dt="2021-09-04T14:50:56.050" v="7078"/>
-        <pc:sldMkLst>
-          <pc:docMk/>
-          <pc:sldMk cId="1938657038" sldId="272"/>
-        </pc:sldMkLst>
-        <pc:spChg chg="mod">
-          <ac:chgData name="laurent mayer" userId="c07e7b6061ff73d3" providerId="LiveId" clId="{7D450AA3-046A-48FC-ABB5-54D7AA942888}" dt="2021-09-01T16:17:51.810" v="6360" actId="207"/>
-          <ac:spMkLst>
-            <pc:docMk/>
-            <pc:sldMk cId="1938657038" sldId="272"/>
-            <ac:spMk id="2" creationId="{07013891-A816-4E82-9609-09B625A9C671}"/>
-          </ac:spMkLst>
-        </pc:spChg>
-        <pc:spChg chg="mod">
-          <ac:chgData name="laurent mayer" userId="c07e7b6061ff73d3" providerId="LiveId" clId="{7D450AA3-046A-48FC-ABB5-54D7AA942888}" dt="2021-09-04T14:47:37.654" v="7030" actId="20577"/>
-          <ac:spMkLst>
-            <pc:docMk/>
-            <pc:sldMk cId="1938657038" sldId="272"/>
-            <ac:spMk id="3" creationId="{77A99FF2-0ADF-4726-99CA-88F2501CC9A5}"/>
-          </ac:spMkLst>
-        </pc:spChg>
-        <pc:picChg chg="add del mod">
-          <ac:chgData name="laurent mayer" userId="c07e7b6061ff73d3" providerId="LiveId" clId="{7D450AA3-046A-48FC-ABB5-54D7AA942888}" dt="2021-09-04T14:46:53.874" v="7018" actId="21"/>
-          <ac:picMkLst>
-            <pc:docMk/>
-            <pc:sldMk cId="1938657038" sldId="272"/>
-            <ac:picMk id="4" creationId="{2B57F479-058D-4156-8113-C66DDE326EC3}"/>
-          </ac:picMkLst>
-        </pc:picChg>
-      </pc:sldChg>
-      <pc:sldChg chg="addSp delSp modSp new mod modTransition chgLayout">
-        <pc:chgData name="laurent mayer" userId="c07e7b6061ff73d3" providerId="LiveId" clId="{7D450AA3-046A-48FC-ABB5-54D7AA942888}" dt="2021-09-04T14:50:56.050" v="7078"/>
-        <pc:sldMkLst>
-          <pc:docMk/>
-          <pc:sldMk cId="2586275938" sldId="273"/>
-        </pc:sldMkLst>
-        <pc:spChg chg="del">
-          <ac:chgData name="laurent mayer" userId="c07e7b6061ff73d3" providerId="LiveId" clId="{7D450AA3-046A-48FC-ABB5-54D7AA942888}" dt="2021-09-04T14:47:05.467" v="7020" actId="700"/>
-          <ac:spMkLst>
-            <pc:docMk/>
-            <pc:sldMk cId="2586275938" sldId="273"/>
-            <ac:spMk id="2" creationId="{B02CB033-5750-4866-AE30-E76F23B3D4FA}"/>
-          </ac:spMkLst>
-        </pc:spChg>
-        <pc:spChg chg="del">
-          <ac:chgData name="laurent mayer" userId="c07e7b6061ff73d3" providerId="LiveId" clId="{7D450AA3-046A-48FC-ABB5-54D7AA942888}" dt="2021-09-04T14:47:05.467" v="7020" actId="700"/>
-          <ac:spMkLst>
-            <pc:docMk/>
-            <pc:sldMk cId="2586275938" sldId="273"/>
-            <ac:spMk id="3" creationId="{940DE387-47AD-4210-8126-D74775C1F5B4}"/>
-          </ac:spMkLst>
-        </pc:spChg>
-        <pc:spChg chg="add mod ord">
-          <ac:chgData name="laurent mayer" userId="c07e7b6061ff73d3" providerId="LiveId" clId="{7D450AA3-046A-48FC-ABB5-54D7AA942888}" dt="2021-09-04T14:48:33.918" v="7067" actId="122"/>
-          <ac:spMkLst>
-            <pc:docMk/>
-            <pc:sldMk cId="2586275938" sldId="273"/>
-            <ac:spMk id="4" creationId="{72DE6800-6223-4850-91CD-8B369F4EF3E6}"/>
-          </ac:spMkLst>
-        </pc:spChg>
-        <pc:spChg chg="add mod ord">
-          <ac:chgData name="laurent mayer" userId="c07e7b6061ff73d3" providerId="LiveId" clId="{7D450AA3-046A-48FC-ABB5-54D7AA942888}" dt="2021-09-04T14:48:49.855" v="7069" actId="20577"/>
-          <ac:spMkLst>
-            <pc:docMk/>
-            <pc:sldMk cId="2586275938" sldId="273"/>
-            <ac:spMk id="5" creationId="{249A0B5D-F80C-437F-BDCE-47625C1F1123}"/>
-          </ac:spMkLst>
-        </pc:spChg>
-        <pc:picChg chg="add mod">
-          <ac:chgData name="laurent mayer" userId="c07e7b6061ff73d3" providerId="LiveId" clId="{7D450AA3-046A-48FC-ABB5-54D7AA942888}" dt="2021-09-04T14:48:02.263" v="7035" actId="1076"/>
-          <ac:picMkLst>
-            <pc:docMk/>
-            <pc:sldMk cId="2586275938" sldId="273"/>
-            <ac:picMk id="6" creationId="{6D08AE7B-34F8-49E9-9072-57A8DEFB5124}"/>
-          </ac:picMkLst>
-        </pc:picChg>
-      </pc:sldChg>
-      <pc:sldMasterChg chg="modTransition setBg modSldLayout">
-        <pc:chgData name="laurent mayer" userId="c07e7b6061ff73d3" providerId="LiveId" clId="{7D450AA3-046A-48FC-ABB5-54D7AA942888}" dt="2021-09-04T14:50:56.050" v="7078"/>
-        <pc:sldMasterMkLst>
-          <pc:docMk/>
-          <pc:sldMasterMk cId="3472988572" sldId="2147483648"/>
-        </pc:sldMasterMkLst>
-        <pc:sldLayoutChg chg="modTransition setBg">
-          <pc:chgData name="laurent mayer" userId="c07e7b6061ff73d3" providerId="LiveId" clId="{7D450AA3-046A-48FC-ABB5-54D7AA942888}" dt="2021-09-04T14:50:56.050" v="7078"/>
-          <pc:sldLayoutMkLst>
-            <pc:docMk/>
-            <pc:sldMasterMk cId="3472988572" sldId="2147483648"/>
-            <pc:sldLayoutMk cId="522942888" sldId="2147483649"/>
-          </pc:sldLayoutMkLst>
-        </pc:sldLayoutChg>
-        <pc:sldLayoutChg chg="modTransition setBg">
-          <pc:chgData name="laurent mayer" userId="c07e7b6061ff73d3" providerId="LiveId" clId="{7D450AA3-046A-48FC-ABB5-54D7AA942888}" dt="2021-09-04T14:50:56.050" v="7078"/>
-          <pc:sldLayoutMkLst>
-            <pc:docMk/>
-            <pc:sldMasterMk cId="3472988572" sldId="2147483648"/>
-            <pc:sldLayoutMk cId="2717460069" sldId="2147483650"/>
-          </pc:sldLayoutMkLst>
-        </pc:sldLayoutChg>
-        <pc:sldLayoutChg chg="modTransition setBg">
-          <pc:chgData name="laurent mayer" userId="c07e7b6061ff73d3" providerId="LiveId" clId="{7D450AA3-046A-48FC-ABB5-54D7AA942888}" dt="2021-09-04T14:50:56.050" v="7078"/>
-          <pc:sldLayoutMkLst>
-            <pc:docMk/>
-            <pc:sldMasterMk cId="3472988572" sldId="2147483648"/>
-            <pc:sldLayoutMk cId="175018453" sldId="2147483651"/>
-          </pc:sldLayoutMkLst>
-        </pc:sldLayoutChg>
-        <pc:sldLayoutChg chg="modTransition setBg">
-          <pc:chgData name="laurent mayer" userId="c07e7b6061ff73d3" providerId="LiveId" clId="{7D450AA3-046A-48FC-ABB5-54D7AA942888}" dt="2021-09-04T14:50:56.050" v="7078"/>
-          <pc:sldLayoutMkLst>
-            <pc:docMk/>
-            <pc:sldMasterMk cId="3472988572" sldId="2147483648"/>
-            <pc:sldLayoutMk cId="1866912151" sldId="2147483652"/>
-          </pc:sldLayoutMkLst>
-        </pc:sldLayoutChg>
-        <pc:sldLayoutChg chg="modTransition setBg">
-          <pc:chgData name="laurent mayer" userId="c07e7b6061ff73d3" providerId="LiveId" clId="{7D450AA3-046A-48FC-ABB5-54D7AA942888}" dt="2021-09-04T14:50:56.050" v="7078"/>
-          <pc:sldLayoutMkLst>
-            <pc:docMk/>
-            <pc:sldMasterMk cId="3472988572" sldId="2147483648"/>
-            <pc:sldLayoutMk cId="4205362336" sldId="2147483653"/>
-          </pc:sldLayoutMkLst>
-        </pc:sldLayoutChg>
-        <pc:sldLayoutChg chg="modTransition setBg">
-          <pc:chgData name="laurent mayer" userId="c07e7b6061ff73d3" providerId="LiveId" clId="{7D450AA3-046A-48FC-ABB5-54D7AA942888}" dt="2021-09-04T14:50:56.050" v="7078"/>
-          <pc:sldLayoutMkLst>
-            <pc:docMk/>
-            <pc:sldMasterMk cId="3472988572" sldId="2147483648"/>
-            <pc:sldLayoutMk cId="2763810041" sldId="2147483654"/>
-          </pc:sldLayoutMkLst>
-        </pc:sldLayoutChg>
-        <pc:sldLayoutChg chg="modTransition setBg">
-          <pc:chgData name="laurent mayer" userId="c07e7b6061ff73d3" providerId="LiveId" clId="{7D450AA3-046A-48FC-ABB5-54D7AA942888}" dt="2021-09-04T14:50:56.050" v="7078"/>
-          <pc:sldLayoutMkLst>
-            <pc:docMk/>
-            <pc:sldMasterMk cId="3472988572" sldId="2147483648"/>
-            <pc:sldLayoutMk cId="1203260815" sldId="2147483655"/>
-          </pc:sldLayoutMkLst>
-        </pc:sldLayoutChg>
-        <pc:sldLayoutChg chg="modTransition setBg">
-          <pc:chgData name="laurent mayer" userId="c07e7b6061ff73d3" providerId="LiveId" clId="{7D450AA3-046A-48FC-ABB5-54D7AA942888}" dt="2021-09-04T14:50:56.050" v="7078"/>
-          <pc:sldLayoutMkLst>
-            <pc:docMk/>
-            <pc:sldMasterMk cId="3472988572" sldId="2147483648"/>
-            <pc:sldLayoutMk cId="2295651117" sldId="2147483656"/>
-          </pc:sldLayoutMkLst>
-        </pc:sldLayoutChg>
-        <pc:sldLayoutChg chg="modTransition setBg">
-          <pc:chgData name="laurent mayer" userId="c07e7b6061ff73d3" providerId="LiveId" clId="{7D450AA3-046A-48FC-ABB5-54D7AA942888}" dt="2021-09-04T14:50:56.050" v="7078"/>
-          <pc:sldLayoutMkLst>
-            <pc:docMk/>
-            <pc:sldMasterMk cId="3472988572" sldId="2147483648"/>
-            <pc:sldLayoutMk cId="3151545004" sldId="2147483657"/>
-          </pc:sldLayoutMkLst>
-        </pc:sldLayoutChg>
-        <pc:sldLayoutChg chg="modTransition setBg">
-          <pc:chgData name="laurent mayer" userId="c07e7b6061ff73d3" providerId="LiveId" clId="{7D450AA3-046A-48FC-ABB5-54D7AA942888}" dt="2021-09-04T14:50:56.050" v="7078"/>
-          <pc:sldLayoutMkLst>
-            <pc:docMk/>
-            <pc:sldMasterMk cId="3472988572" sldId="2147483648"/>
-            <pc:sldLayoutMk cId="1542287250" sldId="2147483658"/>
-          </pc:sldLayoutMkLst>
-        </pc:sldLayoutChg>
-        <pc:sldLayoutChg chg="modTransition setBg">
-          <pc:chgData name="laurent mayer" userId="c07e7b6061ff73d3" providerId="LiveId" clId="{7D450AA3-046A-48FC-ABB5-54D7AA942888}" dt="2021-09-04T14:50:56.050" v="7078"/>
-          <pc:sldLayoutMkLst>
-            <pc:docMk/>
-            <pc:sldMasterMk cId="3472988572" sldId="2147483648"/>
-            <pc:sldLayoutMk cId="1887528514" sldId="2147483659"/>
-          </pc:sldLayoutMkLst>
-        </pc:sldLayoutChg>
-      </pc:sldMasterChg>
-    </pc:docChg>
-  </pc:docChgLst>
-  <pc:docChgLst>
-    <pc:chgData name="laurent mayer" userId="c07e7b6061ff73d3" providerId="LiveId" clId="{81D0AD2A-A5D2-4F29-9A3C-E1EFA31B469C}"/>
-    <pc:docChg chg="custSel modSld">
-      <pc:chgData name="laurent mayer" userId="c07e7b6061ff73d3" providerId="LiveId" clId="{81D0AD2A-A5D2-4F29-9A3C-E1EFA31B469C}" dt="2023-09-06T09:31:37.267" v="78" actId="207"/>
-      <pc:docMkLst>
-        <pc:docMk/>
-      </pc:docMkLst>
-      <pc:sldChg chg="modSp mod">
-        <pc:chgData name="laurent mayer" userId="c07e7b6061ff73d3" providerId="LiveId" clId="{81D0AD2A-A5D2-4F29-9A3C-E1EFA31B469C}" dt="2023-09-06T09:31:37.267" v="78" actId="207"/>
-        <pc:sldMkLst>
-          <pc:docMk/>
-          <pc:sldMk cId="4137575012" sldId="260"/>
-        </pc:sldMkLst>
-        <pc:spChg chg="mod">
-          <ac:chgData name="laurent mayer" userId="c07e7b6061ff73d3" providerId="LiveId" clId="{81D0AD2A-A5D2-4F29-9A3C-E1EFA31B469C}" dt="2023-09-06T09:31:37.267" v="78" actId="207"/>
-          <ac:spMkLst>
-            <pc:docMk/>
-            <pc:sldMk cId="4137575012" sldId="260"/>
-            <ac:spMk id="3" creationId="{E3CC8506-3F66-4901-B787-87052BBC1ABF}"/>
-          </ac:spMkLst>
-        </pc:spChg>
       </pc:sldChg>
     </pc:docChg>
   </pc:docChgLst>
@@ -1276,7 +192,7 @@
 </file>
 
 <file path=ppt/diagrams/colors1.xml><?xml version="1.0" encoding="utf-8"?>
-<dgm:colorsDef xmlns:dgm="http://schemas.openxmlformats.org/drawingml/2006/diagram" xmlns:a="http://schemas.openxmlformats.org/drawingml/2006/main" uniqueId="urn:microsoft.com/office/officeart/2005/8/colors/accent1_2">
+<dgm:colorsDef xmlns:dgm="http://schemas.openxmlformats.org/drawingml/2006/diagram" xmlns:a="http://schemas.openxmlformats.org/drawingml/2006/main" uniqueId="urn:microsoft.com/office/officeart/2005/8/colors/accent1_2#1">
   <dgm:title val=""/>
   <dgm:desc val=""/>
   <dgm:catLst>
@@ -2026,7 +942,7 @@
 <dgm:dataModel xmlns:dgm="http://schemas.openxmlformats.org/drawingml/2006/diagram" xmlns:a="http://schemas.openxmlformats.org/drawingml/2006/main">
   <dgm:ptLst>
     <dgm:pt modelId="{C5060E16-B9CB-4074-95A4-9A24A2951D8D}" type="doc">
-      <dgm:prSet loTypeId="urn:microsoft.com/office/officeart/2005/8/layout/cycle6" loCatId="cycle" qsTypeId="urn:microsoft.com/office/officeart/2005/8/quickstyle/simple1" qsCatId="simple" csTypeId="urn:microsoft.com/office/officeart/2005/8/colors/accent1_2" csCatId="accent1"/>
+      <dgm:prSet loTypeId="urn:microsoft.com/office/officeart/2005/8/layout/cycle6" loCatId="cycle" qsTypeId="urn:microsoft.com/office/officeart/2005/8/quickstyle/simple1#1" qsCatId="simple" csTypeId="urn:microsoft.com/office/officeart/2005/8/colors/accent1_2#1" csCatId="accent1"/>
       <dgm:spPr/>
       <dgm:t>
         <a:bodyPr/>
@@ -2663,7 +1579,7 @@
 </file>
 
 <file path=ppt/diagrams/quickStyle1.xml><?xml version="1.0" encoding="utf-8"?>
-<dgm:styleDef xmlns:dgm="http://schemas.openxmlformats.org/drawingml/2006/diagram" xmlns:a="http://schemas.openxmlformats.org/drawingml/2006/main" uniqueId="urn:microsoft.com/office/officeart/2005/8/quickstyle/simple1">
+<dgm:styleDef xmlns:dgm="http://schemas.openxmlformats.org/drawingml/2006/diagram" xmlns:a="http://schemas.openxmlformats.org/drawingml/2006/main" uniqueId="urn:microsoft.com/office/officeart/2005/8/quickstyle/simple1#1">
   <dgm:title val=""/>
   <dgm:desc val=""/>
   <dgm:catLst>
@@ -3843,7 +2759,7 @@
           <a:p>
             <a:fld id="{35FDA2E6-7436-4431-B7FD-18DF53C8EC1C}" type="datetimeFigureOut">
               <a:rPr lang="fr-FR" smtClean="0"/>
-              <a:t>02/09/2024</a:t>
+              <a:t>05/09/2026</a:t>
             </a:fld>
             <a:endParaRPr lang="fr-FR"/>
           </a:p>
@@ -4053,7 +2969,7 @@
           <a:p>
             <a:fld id="{35FDA2E6-7436-4431-B7FD-18DF53C8EC1C}" type="datetimeFigureOut">
               <a:rPr lang="fr-FR" smtClean="0"/>
-              <a:t>02/09/2024</a:t>
+              <a:t>05/09/2026</a:t>
             </a:fld>
             <a:endParaRPr lang="fr-FR"/>
           </a:p>
@@ -4273,7 +3189,7 @@
           <a:p>
             <a:fld id="{35FDA2E6-7436-4431-B7FD-18DF53C8EC1C}" type="datetimeFigureOut">
               <a:rPr lang="fr-FR" smtClean="0"/>
-              <a:t>02/09/2024</a:t>
+              <a:t>05/09/2026</a:t>
             </a:fld>
             <a:endParaRPr lang="fr-FR"/>
           </a:p>
@@ -4483,7 +3399,7 @@
           <a:p>
             <a:fld id="{35FDA2E6-7436-4431-B7FD-18DF53C8EC1C}" type="datetimeFigureOut">
               <a:rPr lang="fr-FR" smtClean="0"/>
-              <a:t>02/09/2024</a:t>
+              <a:t>05/09/2026</a:t>
             </a:fld>
             <a:endParaRPr lang="fr-FR"/>
           </a:p>
@@ -4770,7 +3686,7 @@
           <a:p>
             <a:fld id="{35FDA2E6-7436-4431-B7FD-18DF53C8EC1C}" type="datetimeFigureOut">
               <a:rPr lang="fr-FR" smtClean="0"/>
-              <a:t>02/09/2024</a:t>
+              <a:t>05/09/2026</a:t>
             </a:fld>
             <a:endParaRPr lang="fr-FR"/>
           </a:p>
@@ -5047,7 +3963,7 @@
           <a:p>
             <a:fld id="{35FDA2E6-7436-4431-B7FD-18DF53C8EC1C}" type="datetimeFigureOut">
               <a:rPr lang="fr-FR" smtClean="0"/>
-              <a:t>02/09/2024</a:t>
+              <a:t>05/09/2026</a:t>
             </a:fld>
             <a:endParaRPr lang="fr-FR"/>
           </a:p>
@@ -5471,7 +4387,7 @@
           <a:p>
             <a:fld id="{35FDA2E6-7436-4431-B7FD-18DF53C8EC1C}" type="datetimeFigureOut">
               <a:rPr lang="fr-FR" smtClean="0"/>
-              <a:t>02/09/2024</a:t>
+              <a:t>05/09/2026</a:t>
             </a:fld>
             <a:endParaRPr lang="fr-FR"/>
           </a:p>
@@ -5624,7 +4540,7 @@
           <a:p>
             <a:fld id="{35FDA2E6-7436-4431-B7FD-18DF53C8EC1C}" type="datetimeFigureOut">
               <a:rPr lang="fr-FR" smtClean="0"/>
-              <a:t>02/09/2024</a:t>
+              <a:t>05/09/2026</a:t>
             </a:fld>
             <a:endParaRPr lang="fr-FR"/>
           </a:p>
@@ -5749,7 +4665,7 @@
           <a:p>
             <a:fld id="{35FDA2E6-7436-4431-B7FD-18DF53C8EC1C}" type="datetimeFigureOut">
               <a:rPr lang="fr-FR" smtClean="0"/>
-              <a:t>02/09/2024</a:t>
+              <a:t>05/09/2026</a:t>
             </a:fld>
             <a:endParaRPr lang="fr-FR"/>
           </a:p>
@@ -6072,7 +4988,7 @@
           <a:p>
             <a:fld id="{35FDA2E6-7436-4431-B7FD-18DF53C8EC1C}" type="datetimeFigureOut">
               <a:rPr lang="fr-FR" smtClean="0"/>
-              <a:t>02/09/2024</a:t>
+              <a:t>05/09/2026</a:t>
             </a:fld>
             <a:endParaRPr lang="fr-FR"/>
           </a:p>
@@ -6372,7 +5288,7 @@
           <a:p>
             <a:fld id="{35FDA2E6-7436-4431-B7FD-18DF53C8EC1C}" type="datetimeFigureOut">
               <a:rPr lang="fr-FR" smtClean="0"/>
-              <a:t>02/09/2024</a:t>
+              <a:t>05/09/2026</a:t>
             </a:fld>
             <a:endParaRPr lang="fr-FR"/>
           </a:p>
@@ -6655,7 +5571,7 @@
           <a:p>
             <a:fld id="{35FDA2E6-7436-4431-B7FD-18DF53C8EC1C}" type="datetimeFigureOut">
               <a:rPr lang="fr-FR" smtClean="0"/>
-              <a:t>02/09/2024</a:t>
+              <a:t>05/09/2026</a:t>
             </a:fld>
             <a:endParaRPr lang="fr-FR"/>
           </a:p>
@@ -8298,274 +7214,6 @@
                   <a:srgbClr val="002060"/>
                 </a:solidFill>
               </a:rPr>
-              <a:t>Projet / Open AI</a:t>
-            </a:r>
-            <a:endParaRPr lang="fr-FR" dirty="0"/>
-          </a:p>
-        </p:txBody>
-      </p:sp>
-      <p:sp>
-        <p:nvSpPr>
-          <p:cNvPr id="2" name="Espace réservé du contenu 1">
-            <a:extLst>
-              <a:ext uri="{FF2B5EF4-FFF2-40B4-BE49-F238E27FC236}">
-                <a16:creationId xmlns:a16="http://schemas.microsoft.com/office/drawing/2014/main" id="{0BE0E897-9AED-30BD-48D9-2ECCEF704597}"/>
-              </a:ext>
-            </a:extLst>
-          </p:cNvPr>
-          <p:cNvSpPr>
-            <a:spLocks noGrp="1"/>
-          </p:cNvSpPr>
-          <p:nvPr>
-            <p:ph sz="half" idx="1"/>
-          </p:nvPr>
-        </p:nvSpPr>
-        <p:spPr>
-          <a:xfrm>
-            <a:off x="838200" y="1825625"/>
-            <a:ext cx="5181600" cy="3834946"/>
-          </a:xfrm>
-        </p:spPr>
-        <p:txBody>
-          <a:bodyPr>
-            <a:normAutofit/>
-          </a:bodyPr>
-          <a:lstStyle/>
-          <a:p>
-            <a:pPr marL="0" indent="0">
-              <a:buNone/>
-            </a:pPr>
-            <a:r>
-              <a:rPr lang="fr-FR" b="1" u="sng" dirty="0"/>
-              <a:t>Second / Troisième trimestre </a:t>
-            </a:r>
-          </a:p>
-          <a:p>
-            <a:pPr>
-              <a:buFont typeface="Wingdings" panose="05000000000000000000" pitchFamily="2" charset="2"/>
-              <a:buChar char="Ø"/>
-            </a:pPr>
-            <a:endParaRPr lang="fr-FR" dirty="0"/>
-          </a:p>
-          <a:p>
-            <a:pPr>
-              <a:buFont typeface="Wingdings" panose="05000000000000000000" pitchFamily="2" charset="2"/>
-              <a:buChar char="Ø"/>
-            </a:pPr>
-            <a:r>
-              <a:rPr lang="fr-FR" dirty="0"/>
-              <a:t> </a:t>
-            </a:r>
-            <a:r>
-              <a:rPr lang="fr-FR" b="1" dirty="0"/>
-              <a:t>Utilisation et configuration d’Open AI (</a:t>
-            </a:r>
-            <a:r>
-              <a:rPr lang="fr-FR" b="1" dirty="0">
-                <a:solidFill>
-                  <a:schemeClr val="accent1">
-                    <a:lumMod val="75000"/>
-                  </a:schemeClr>
-                </a:solidFill>
-              </a:rPr>
-              <a:t>ChatGPT</a:t>
-            </a:r>
-            <a:r>
-              <a:rPr lang="fr-FR" b="1" dirty="0"/>
-              <a:t>).</a:t>
-            </a:r>
-          </a:p>
-          <a:p>
-            <a:pPr>
-              <a:buFont typeface="Wingdings" panose="05000000000000000000" pitchFamily="2" charset="2"/>
-              <a:buChar char="Ø"/>
-            </a:pPr>
-            <a:endParaRPr lang="fr-FR" b="1" dirty="0"/>
-          </a:p>
-          <a:p>
-            <a:pPr>
-              <a:buFont typeface="Wingdings" panose="05000000000000000000" pitchFamily="2" charset="2"/>
-              <a:buChar char="Ø"/>
-            </a:pPr>
-            <a:r>
-              <a:rPr lang="fr-FR" b="1" dirty="0"/>
-              <a:t> Création du jeu </a:t>
-            </a:r>
-            <a:r>
-              <a:rPr lang="fr-FR" b="1" dirty="0">
-                <a:solidFill>
-                  <a:schemeClr val="accent1">
-                    <a:lumMod val="75000"/>
-                  </a:schemeClr>
-                </a:solidFill>
-              </a:rPr>
-              <a:t>Suika</a:t>
-            </a:r>
-            <a:r>
-              <a:rPr lang="fr-FR" b="1" dirty="0"/>
-              <a:t> à l’aide de ChatGPT.</a:t>
-            </a:r>
-          </a:p>
-          <a:p>
-            <a:pPr marL="0" indent="0">
-              <a:buNone/>
-            </a:pPr>
-            <a:endParaRPr lang="fr-FR" b="1" dirty="0"/>
-          </a:p>
-          <a:p>
-            <a:pPr>
-              <a:buFont typeface="Wingdings" panose="05000000000000000000" pitchFamily="2" charset="2"/>
-              <a:buChar char="Ø"/>
-            </a:pPr>
-            <a:endParaRPr lang="fr-FR" b="1" dirty="0"/>
-          </a:p>
-        </p:txBody>
-      </p:sp>
-      <p:sp>
-        <p:nvSpPr>
-          <p:cNvPr id="3" name="Espace réservé du contenu 2">
-            <a:extLst>
-              <a:ext uri="{FF2B5EF4-FFF2-40B4-BE49-F238E27FC236}">
-                <a16:creationId xmlns:a16="http://schemas.microsoft.com/office/drawing/2014/main" id="{749F0171-8AAB-6F7A-B680-88FB3A4DF5D0}"/>
-              </a:ext>
-            </a:extLst>
-          </p:cNvPr>
-          <p:cNvSpPr>
-            <a:spLocks noGrp="1"/>
-          </p:cNvSpPr>
-          <p:nvPr>
-            <p:ph sz="half" idx="2"/>
-          </p:nvPr>
-        </p:nvSpPr>
-        <p:spPr/>
-        <p:txBody>
-          <a:bodyPr>
-            <a:normAutofit/>
-          </a:bodyPr>
-          <a:lstStyle/>
-          <a:p>
-            <a:pPr marL="0" indent="0" algn="ctr">
-              <a:buNone/>
-            </a:pPr>
-            <a:r>
-              <a:rPr lang="fr-FR" b="1" i="1" u="sng" dirty="0"/>
-              <a:t>Exemple</a:t>
-            </a:r>
-          </a:p>
-          <a:p>
-            <a:pPr marL="0" indent="0">
-              <a:buNone/>
-            </a:pPr>
-            <a:endParaRPr lang="fr-FR" dirty="0"/>
-          </a:p>
-          <a:p>
-            <a:pPr marL="0" indent="0">
-              <a:buNone/>
-            </a:pPr>
-            <a:endParaRPr lang="fr-FR" dirty="0"/>
-          </a:p>
-        </p:txBody>
-      </p:sp>
-      <p:pic>
-        <p:nvPicPr>
-          <p:cNvPr id="7" name="Image 6">
-            <a:extLst>
-              <a:ext uri="{FF2B5EF4-FFF2-40B4-BE49-F238E27FC236}">
-                <a16:creationId xmlns:a16="http://schemas.microsoft.com/office/drawing/2014/main" id="{87258350-A662-A73B-6D99-02BDFC7024BF}"/>
-              </a:ext>
-            </a:extLst>
-          </p:cNvPr>
-          <p:cNvPicPr>
-            <a:picLocks noChangeAspect="1"/>
-          </p:cNvPicPr>
-          <p:nvPr/>
-        </p:nvPicPr>
-        <p:blipFill>
-          <a:blip r:embed="rId2"/>
-          <a:stretch>
-            <a:fillRect/>
-          </a:stretch>
-        </p:blipFill>
-        <p:spPr>
-          <a:xfrm>
-            <a:off x="6096000" y="2590800"/>
-            <a:ext cx="6019800" cy="3429000"/>
-          </a:xfrm>
-          <a:prstGeom prst="rect">
-            <a:avLst/>
-          </a:prstGeom>
-        </p:spPr>
-      </p:pic>
-    </p:spTree>
-    <p:extLst>
-      <p:ext uri="{BB962C8B-B14F-4D97-AF65-F5344CB8AC3E}">
-        <p14:creationId xmlns:p14="http://schemas.microsoft.com/office/powerpoint/2010/main" val="3923696457"/>
-      </p:ext>
-    </p:extLst>
-  </p:cSld>
-  <p:clrMapOvr>
-    <a:masterClrMapping/>
-  </p:clrMapOvr>
-  <mc:AlternateContent xmlns:mc="http://schemas.openxmlformats.org/markup-compatibility/2006" xmlns:p14="http://schemas.microsoft.com/office/powerpoint/2010/main">
-    <mc:Choice Requires="p14">
-      <p:transition spd="med" p14:dur="700">
-        <p:fade/>
-      </p:transition>
-    </mc:Choice>
-    <mc:Fallback xmlns="">
-      <p:transition spd="med">
-        <p:fade/>
-      </p:transition>
-    </mc:Fallback>
-  </mc:AlternateContent>
-</p:sld>
-</file>
-
-<file path=ppt/slides/slide15.xml><?xml version="1.0" encoding="utf-8"?>
-<p:sld xmlns:a="http://schemas.openxmlformats.org/drawingml/2006/main" xmlns:r="http://schemas.openxmlformats.org/officeDocument/2006/relationships" xmlns:p="http://schemas.openxmlformats.org/presentationml/2006/main">
-  <p:cSld>
-    <p:spTree>
-      <p:nvGrpSpPr>
-        <p:cNvPr id="1" name=""/>
-        <p:cNvGrpSpPr/>
-        <p:nvPr/>
-      </p:nvGrpSpPr>
-      <p:grpSpPr>
-        <a:xfrm>
-          <a:off x="0" y="0"/>
-          <a:ext cx="0" cy="0"/>
-          <a:chOff x="0" y="0"/>
-          <a:chExt cx="0" cy="0"/>
-        </a:xfrm>
-      </p:grpSpPr>
-      <p:sp>
-        <p:nvSpPr>
-          <p:cNvPr id="4" name="Titre 3">
-            <a:extLst>
-              <a:ext uri="{FF2B5EF4-FFF2-40B4-BE49-F238E27FC236}">
-                <a16:creationId xmlns:a16="http://schemas.microsoft.com/office/drawing/2014/main" id="{72DE6800-6223-4850-91CD-8B369F4EF3E6}"/>
-              </a:ext>
-            </a:extLst>
-          </p:cNvPr>
-          <p:cNvSpPr>
-            <a:spLocks noGrp="1"/>
-          </p:cNvSpPr>
-          <p:nvPr>
-            <p:ph type="title"/>
-          </p:nvPr>
-        </p:nvSpPr>
-        <p:spPr/>
-        <p:txBody>
-          <a:bodyPr/>
-          <a:lstStyle/>
-          <a:p>
-            <a:pPr algn="ctr"/>
-            <a:r>
-              <a:rPr lang="fr-FR" b="1" dirty="0">
-                <a:solidFill>
-                  <a:srgbClr val="002060"/>
-                </a:solidFill>
-              </a:rPr>
               <a:t>Le machine learning : programmation</a:t>
             </a:r>
             <a:endParaRPr lang="fr-FR" dirty="0"/>
@@ -8751,13 +7399,13 @@
   <p:clrMapOvr>
     <a:masterClrMapping/>
   </p:clrMapOvr>
-  <mc:AlternateContent xmlns:mc="http://schemas.openxmlformats.org/markup-compatibility/2006">
-    <mc:Choice xmlns:p14="http://schemas.microsoft.com/office/powerpoint/2010/main" Requires="p14">
+  <mc:AlternateContent xmlns:mc="http://schemas.openxmlformats.org/markup-compatibility/2006" xmlns:p14="http://schemas.microsoft.com/office/powerpoint/2010/main">
+    <mc:Choice Requires="p14">
       <p:transition spd="med" p14:dur="700">
         <p:fade/>
       </p:transition>
     </mc:Choice>
-    <mc:Fallback>
+    <mc:Fallback xmlns="">
       <p:transition spd="med">
         <p:fade/>
       </p:transition>
@@ -9759,41 +8407,6 @@
               <a:t>.</a:t>
             </a:r>
           </a:p>
-          <a:p>
-            <a:pPr marL="971550" lvl="1" indent="-514350">
-              <a:buFont typeface="+mj-lt"/>
-              <a:buAutoNum type="arabicPeriod"/>
-            </a:pPr>
-            <a:r>
-              <a:rPr lang="fr-FR" b="1" dirty="0">
-                <a:sym typeface="Wingdings" panose="05000000000000000000" pitchFamily="2" charset="2"/>
-              </a:rPr>
-              <a:t>Introduction </a:t>
-            </a:r>
-            <a:r>
-              <a:rPr lang="fr-FR" b="1" dirty="0">
-                <a:solidFill>
-                  <a:srgbClr val="FF0000"/>
-                </a:solidFill>
-                <a:sym typeface="Wingdings" panose="05000000000000000000" pitchFamily="2" charset="2"/>
-              </a:rPr>
-              <a:t>au langage C</a:t>
-            </a:r>
-            <a:r>
-              <a:rPr lang="fr-FR" b="1" dirty="0">
-                <a:sym typeface="Wingdings" panose="05000000000000000000" pitchFamily="2" charset="2"/>
-              </a:rPr>
-              <a:t>.</a:t>
-            </a:r>
-            <a:endParaRPr lang="fr-FR" b="1" dirty="0"/>
-          </a:p>
-          <a:p>
-            <a:pPr marL="971550" lvl="1" indent="-514350">
-              <a:buFont typeface="+mj-lt"/>
-              <a:buAutoNum type="arabicPeriod"/>
-            </a:pPr>
-            <a:endParaRPr lang="fr-FR" b="1" dirty="0"/>
-          </a:p>
         </p:txBody>
       </p:sp>
       <p:pic>
@@ -9811,13 +8424,13 @@
           <p:nvPr/>
         </p:nvPicPr>
         <p:blipFill>
-          <a:blip r:embed="rId2">
+          <a:blip>
             <a:extLst>
               <a:ext uri="{28A0092B-C50C-407E-A947-70E740481C1C}">
                 <a14:useLocalDpi xmlns:a14="http://schemas.microsoft.com/office/drawing/2010/main" val="0"/>
               </a:ext>
               <a:ext uri="{96DAC541-7B7A-43D3-8B79-37D633B846F1}">
-                <asvg:svgBlip xmlns:asvg="http://schemas.microsoft.com/office/drawing/2016/SVG/main" r:embed="rId3"/>
+                <asvg:svgBlip xmlns:asvg="http://schemas.microsoft.com/office/drawing/2016/SVG/main" r:embed="rId2"/>
               </a:ext>
             </a:extLst>
           </a:blip>
@@ -10048,7 +8661,7 @@
             </a:r>
             <a:r>
               <a:rPr lang="fr-FR" b="1" dirty="0"/>
-              <a:t> : Linux / Windows.</a:t>
+              <a:t> : Windows.</a:t>
             </a:r>
           </a:p>
           <a:p>
@@ -10275,7 +8888,7 @@
             </a:r>
             <a:r>
               <a:rPr lang="fr-FR" b="1" dirty="0"/>
-              <a:t>2 heures </a:t>
+              <a:t>1 à 2 heures </a:t>
             </a:r>
             <a:r>
               <a:rPr lang="fr-FR" b="1" dirty="0">
